--- a/docs/content/05-teaching-resources/slides/specialism/08-installation-and-integration.pptx
+++ b/docs/content/05-teaching-resources/slides/specialism/08-installation-and-integration.pptx
@@ -13,6 +13,10 @@
     <p:sldId id="261" r:id="rId13"/>
     <p:sldId id="262" r:id="rId14"/>
     <p:sldId id="263" r:id="rId15"/>
+    <p:sldId id="264" r:id="rId16"/>
+    <p:sldId id="265" r:id="rId17"/>
+    <p:sldId id="266" r:id="rId18"/>
+    <p:sldId id="267" r:id="rId19"/>
   </p:sldIdLst>
   <p:sldSz cx="12191695" cy="6858000" type="screen4x3"/>
   <p:notesSz cx="6858000" cy="9144000"/>
@@ -509,7 +513,22 @@
           <a:lstStyle/>
           <a:p>
             <a:r>
-              <a:t>Give students a few minutes to answer on mini whiteboards or paper, then reveal the answers on the next slide.</a:t>
+              <a:t>Answers:</a:t>
+            </a:r>
+          </a:p>
+          <a:p>
+            <a:r>
+              <a:t>1. Customer, regulatory, manufacturer.</a:t>
+            </a:r>
+          </a:p>
+          <a:p>
+            <a:r>
+              <a:t>2. To avoid damage or loosening and keep the warranty.</a:t>
+            </a:r>
+          </a:p>
+          <a:p>
+            <a:r>
+              <a:t>3. PUWER.</a:t>
             </a:r>
           </a:p>
         </p:txBody>
@@ -579,7 +598,22 @@
           <a:lstStyle/>
           <a:p>
             <a:r>
-              <a:t>Talk through any answers the class found difficult.</a:t>
+              <a:t>Answers:</a:t>
+            </a:r>
+          </a:p>
+          <a:p>
+            <a:r>
+              <a:t>1. A point where two sub-systems connect.</a:t>
+            </a:r>
+          </a:p>
+          <a:p>
+            <a:r>
+              <a:t>2. Faults are easier to find.</a:t>
+            </a:r>
+          </a:p>
+          <a:p>
+            <a:r>
+              <a:t>3. Commissioning.</a:t>
             </a:r>
           </a:p>
         </p:txBody>
@@ -605,6 +639,146 @@
 </file>
 
 <file path=ppt/notesSlides/notesSlide3.xml><?xml version="1.0" encoding="utf-8"?>
+<p:notes xmlns:a="http://schemas.openxmlformats.org/drawingml/2006/main" xmlns:p="http://schemas.openxmlformats.org/presentationml/2006/main" xmlns:r="http://schemas.openxmlformats.org/officeDocument/2006/relationships">
+  <p:cSld>
+    <p:spTree>
+      <p:nvGrpSpPr>
+        <p:cNvPr id="1" name=""/>
+        <p:cNvGrpSpPr/>
+        <p:nvPr/>
+      </p:nvGrpSpPr>
+      <p:grpSpPr>
+        <a:xfrm>
+          <a:off x="0" y="0"/>
+          <a:ext cx="0" cy="0"/>
+          <a:chOff x="0" y="0"/>
+          <a:chExt cx="0" cy="0"/>
+        </a:xfrm>
+      </p:grpSpPr>
+      <p:sp>
+        <p:nvSpPr>
+          <p:cNvPr id="2" name="Slide Image Placeholder 1"/>
+          <p:cNvSpPr>
+            <a:spLocks noGrp="1"/>
+          </p:cNvSpPr>
+          <p:nvPr>
+            <p:ph type="sldImg" idx="2"/>
+          </p:nvPr>
+        </p:nvSpPr>
+        <p:spPr/>
+      </p:sp>
+      <p:sp>
+        <p:nvSpPr>
+          <p:cNvPr id="3" name="Notes Placeholder 2"/>
+          <p:cNvSpPr>
+            <a:spLocks noGrp="1"/>
+          </p:cNvSpPr>
+          <p:nvPr>
+            <p:ph type="body" idx="3" sz="quarter"/>
+          </p:nvPr>
+        </p:nvSpPr>
+        <p:spPr/>
+        <p:txBody>
+          <a:bodyPr/>
+          <a:lstStyle/>
+          <a:p>
+            <a:r>
+              <a:t>Give students a few minutes to answer on mini whiteboards or paper, then reveal the answers on the next slide.</a:t>
+            </a:r>
+          </a:p>
+        </p:txBody>
+      </p:sp>
+      <p:sp>
+        <p:nvSpPr>
+          <p:cNvPr id="4" name="Slide Number Placeholder 3"/>
+          <p:cNvSpPr>
+            <a:spLocks noGrp="1"/>
+          </p:cNvSpPr>
+          <p:nvPr>
+            <p:ph type="sldNum" idx="5" sz="quarter"/>
+          </p:nvPr>
+        </p:nvSpPr>
+        <p:spPr/>
+      </p:sp>
+    </p:spTree>
+  </p:cSld>
+  <p:clrMapOvr>
+    <a:masterClrMapping/>
+  </p:clrMapOvr>
+</p:notes>
+</file>
+
+<file path=ppt/notesSlides/notesSlide4.xml><?xml version="1.0" encoding="utf-8"?>
+<p:notes xmlns:a="http://schemas.openxmlformats.org/drawingml/2006/main" xmlns:p="http://schemas.openxmlformats.org/presentationml/2006/main" xmlns:r="http://schemas.openxmlformats.org/officeDocument/2006/relationships">
+  <p:cSld>
+    <p:spTree>
+      <p:nvGrpSpPr>
+        <p:cNvPr id="1" name=""/>
+        <p:cNvGrpSpPr/>
+        <p:nvPr/>
+      </p:nvGrpSpPr>
+      <p:grpSpPr>
+        <a:xfrm>
+          <a:off x="0" y="0"/>
+          <a:ext cx="0" cy="0"/>
+          <a:chOff x="0" y="0"/>
+          <a:chExt cx="0" cy="0"/>
+        </a:xfrm>
+      </p:grpSpPr>
+      <p:sp>
+        <p:nvSpPr>
+          <p:cNvPr id="2" name="Slide Image Placeholder 1"/>
+          <p:cNvSpPr>
+            <a:spLocks noGrp="1"/>
+          </p:cNvSpPr>
+          <p:nvPr>
+            <p:ph type="sldImg" idx="2"/>
+          </p:nvPr>
+        </p:nvSpPr>
+        <p:spPr/>
+      </p:sp>
+      <p:sp>
+        <p:nvSpPr>
+          <p:cNvPr id="3" name="Notes Placeholder 2"/>
+          <p:cNvSpPr>
+            <a:spLocks noGrp="1"/>
+          </p:cNvSpPr>
+          <p:nvPr>
+            <p:ph type="body" idx="3" sz="quarter"/>
+          </p:nvPr>
+        </p:nvSpPr>
+        <p:spPr/>
+        <p:txBody>
+          <a:bodyPr/>
+          <a:lstStyle/>
+          <a:p>
+            <a:r>
+              <a:t>Talk through any answers the class found difficult.</a:t>
+            </a:r>
+          </a:p>
+        </p:txBody>
+      </p:sp>
+      <p:sp>
+        <p:nvSpPr>
+          <p:cNvPr id="4" name="Slide Number Placeholder 3"/>
+          <p:cNvSpPr>
+            <a:spLocks noGrp="1"/>
+          </p:cNvSpPr>
+          <p:nvPr>
+            <p:ph type="sldNum" idx="5" sz="quarter"/>
+          </p:nvPr>
+        </p:nvSpPr>
+        <p:spPr/>
+      </p:sp>
+    </p:spTree>
+  </p:cSld>
+  <p:clrMapOvr>
+    <a:masterClrMapping/>
+  </p:clrMapOvr>
+</p:notes>
+</file>
+
+<file path=ppt/notesSlides/notesSlide5.xml><?xml version="1.0" encoding="utf-8"?>
 <p:notes xmlns:a="http://schemas.openxmlformats.org/drawingml/2006/main" xmlns:p="http://schemas.openxmlformats.org/presentationml/2006/main" xmlns:r="http://schemas.openxmlformats.org/officeDocument/2006/relationships">
   <p:cSld>
     <p:spTree>
@@ -3974,6 +4148,1756 @@
 </p:sld>
 </file>
 
+<file path=ppt/slides/slide10.xml><?xml version="1.0" encoding="utf-8"?>
+<p:sld xmlns:a="http://schemas.openxmlformats.org/drawingml/2006/main" xmlns:p="http://schemas.openxmlformats.org/presentationml/2006/main" xmlns:r="http://schemas.openxmlformats.org/officeDocument/2006/relationships">
+  <p:cSld>
+    <p:bg>
+      <p:bgPr>
+        <a:solidFill>
+          <a:srgbClr val="FFFFFF"/>
+        </a:solidFill>
+        <a:effectLst/>
+      </p:bgPr>
+    </p:bg>
+    <p:spTree>
+      <p:nvGrpSpPr>
+        <p:cNvPr id="1" name=""/>
+        <p:cNvGrpSpPr/>
+        <p:nvPr/>
+      </p:nvGrpSpPr>
+      <p:grpSpPr/>
+      <p:sp>
+        <p:nvSpPr>
+          <p:cNvPr id="2" name="TextBox 1"/>
+          <p:cNvSpPr txBox="1"/>
+          <p:nvPr/>
+        </p:nvSpPr>
+        <p:spPr>
+          <a:xfrm>
+            <a:off x="548640" y="320040"/>
+            <a:ext cx="11094415" cy="274320"/>
+          </a:xfrm>
+          <a:prstGeom prst="rect">
+            <a:avLst/>
+          </a:prstGeom>
+          <a:noFill/>
+        </p:spPr>
+        <p:txBody>
+          <a:bodyPr wrap="square" anchor="t" lIns="0" rIns="0" tIns="0" bIns="0"/>
+          <a:lstStyle/>
+          <a:p>
+            <a:pPr algn="l"/>
+            <a:r>
+              <a:rPr sz="1100" b="1" i="0">
+                <a:solidFill>
+                  <a:srgbClr val="54595D"/>
+                </a:solidFill>
+                <a:latin typeface="Calibri"/>
+              </a:rPr>
+              <a:t>MECHANICAL ENGINEERING  ·  Mechanical: Knowledge criteria</a:t>
+            </a:r>
+          </a:p>
+        </p:txBody>
+      </p:sp>
+      <p:sp>
+        <p:nvSpPr>
+          <p:cNvPr id="3" name="TextBox 2"/>
+          <p:cNvSpPr txBox="1"/>
+          <p:nvPr/>
+        </p:nvSpPr>
+        <p:spPr>
+          <a:xfrm>
+            <a:off x="548640" y="566928"/>
+            <a:ext cx="11094415" cy="822960"/>
+          </a:xfrm>
+          <a:prstGeom prst="rect">
+            <a:avLst/>
+          </a:prstGeom>
+          <a:noFill/>
+        </p:spPr>
+        <p:txBody>
+          <a:bodyPr wrap="square" anchor="ctr" lIns="0" rIns="0" tIns="0" bIns="0"/>
+          <a:lstStyle/>
+          <a:p>
+            <a:pPr algn="l"/>
+            <a:r>
+              <a:rPr sz="3200" b="1" i="0">
+                <a:solidFill>
+                  <a:srgbClr val="03306E"/>
+                </a:solidFill>
+                <a:latin typeface="Cambria"/>
+              </a:rPr>
+              <a:t>Answers</a:t>
+            </a:r>
+          </a:p>
+        </p:txBody>
+      </p:sp>
+      <p:sp>
+        <p:nvSpPr>
+          <p:cNvPr id="4" name="TextBox 3"/>
+          <p:cNvSpPr txBox="1"/>
+          <p:nvPr/>
+        </p:nvSpPr>
+        <p:spPr>
+          <a:xfrm>
+            <a:off x="548640" y="6446520"/>
+            <a:ext cx="8229600" cy="274320"/>
+          </a:xfrm>
+          <a:prstGeom prst="rect">
+            <a:avLst/>
+          </a:prstGeom>
+          <a:noFill/>
+        </p:spPr>
+        <p:txBody>
+          <a:bodyPr wrap="square" anchor="t" lIns="0" rIns="0" tIns="0" bIns="0"/>
+          <a:lstStyle/>
+          <a:p>
+            <a:pPr algn="l"/>
+            <a:r>
+              <a:rPr sz="1000" b="0" i="0">
+                <a:solidFill>
+                  <a:srgbClr val="54595D"/>
+                </a:solidFill>
+                <a:latin typeface="Calibri"/>
+              </a:rPr>
+              <a:t>Design and Development for Engineering and Manufacturing T Level  ·  Installation and Integration of Systems</a:t>
+            </a:r>
+          </a:p>
+        </p:txBody>
+      </p:sp>
+      <p:sp>
+        <p:nvSpPr>
+          <p:cNvPr id="5" name="TextBox 4"/>
+          <p:cNvSpPr txBox="1"/>
+          <p:nvPr/>
+        </p:nvSpPr>
+        <p:spPr>
+          <a:xfrm>
+            <a:off x="10728655" y="6446520"/>
+            <a:ext cx="914400" cy="274320"/>
+          </a:xfrm>
+          <a:prstGeom prst="rect">
+            <a:avLst/>
+          </a:prstGeom>
+          <a:noFill/>
+        </p:spPr>
+        <p:txBody>
+          <a:bodyPr wrap="square" anchor="t" lIns="0" rIns="0" tIns="0" bIns="0"/>
+          <a:lstStyle/>
+          <a:p>
+            <a:pPr algn="r"/>
+            <a:r>
+              <a:rPr sz="1000" b="0" i="0">
+                <a:solidFill>
+                  <a:srgbClr val="54595D"/>
+                </a:solidFill>
+                <a:latin typeface="Calibri"/>
+              </a:rPr>
+              <a:t>10</a:t>
+            </a:r>
+          </a:p>
+        </p:txBody>
+      </p:sp>
+      <p:sp>
+        <p:nvSpPr>
+          <p:cNvPr id="6" name="Oval 5"/>
+          <p:cNvSpPr/>
+          <p:nvPr/>
+        </p:nvSpPr>
+        <p:spPr>
+          <a:xfrm>
+            <a:off x="548640" y="1618488"/>
+            <a:ext cx="411480" cy="411480"/>
+          </a:xfrm>
+          <a:prstGeom prst="ellipse">
+            <a:avLst/>
+          </a:prstGeom>
+          <a:solidFill>
+            <a:srgbClr val="E0463A"/>
+          </a:solidFill>
+          <a:ln>
+            <a:noFill/>
+          </a:ln>
+          <a:effectLst/>
+        </p:spPr>
+        <p:style>
+          <a:lnRef idx="1">
+            <a:schemeClr val="accent1"/>
+          </a:lnRef>
+          <a:fillRef idx="3">
+            <a:schemeClr val="accent1"/>
+          </a:fillRef>
+          <a:effectRef idx="2">
+            <a:schemeClr val="accent1"/>
+          </a:effectRef>
+          <a:fontRef idx="minor">
+            <a:schemeClr val="lt1"/>
+          </a:fontRef>
+        </p:style>
+        <p:txBody>
+          <a:bodyPr rtlCol="0" anchor="ctr" lIns="0" rIns="0" tIns="0" bIns="0"/>
+          <a:lstStyle/>
+          <a:p>
+            <a:pPr algn="ctr"/>
+            <a:r>
+              <a:rPr sz="1400" b="1">
+                <a:solidFill>
+                  <a:srgbClr val="FFFFFF"/>
+                </a:solidFill>
+                <a:latin typeface="Calibri"/>
+              </a:rPr>
+              <a:t>1</a:t>
+            </a:r>
+          </a:p>
+        </p:txBody>
+      </p:sp>
+      <p:sp>
+        <p:nvSpPr>
+          <p:cNvPr id="7" name="TextBox 6"/>
+          <p:cNvSpPr txBox="1"/>
+          <p:nvPr/>
+        </p:nvSpPr>
+        <p:spPr>
+          <a:xfrm>
+            <a:off x="1234440" y="1600200"/>
+            <a:ext cx="10408615" cy="1429512"/>
+          </a:xfrm>
+          <a:prstGeom prst="rect">
+            <a:avLst/>
+          </a:prstGeom>
+          <a:noFill/>
+        </p:spPr>
+        <p:txBody>
+          <a:bodyPr wrap="square" anchor="t" lIns="0" rIns="0" tIns="0" bIns="0"/>
+          <a:lstStyle/>
+          <a:p>
+            <a:pPr algn="l"/>
+            <a:r>
+              <a:rPr sz="1800" b="0" i="0">
+                <a:solidFill>
+                  <a:srgbClr val="54595D"/>
+                </a:solidFill>
+                <a:latin typeface="Calibri"/>
+              </a:rPr>
+              <a:t>Name three sources of installation requirements.</a:t>
+            </a:r>
+          </a:p>
+          <a:p>
+            <a:r>
+              <a:rPr sz="1800" b="1">
+                <a:solidFill>
+                  <a:srgbClr val="03306E"/>
+                </a:solidFill>
+                <a:latin typeface="Calibri"/>
+              </a:rPr>
+              <a:t>Customer, regulatory, manufacturer specifications.</a:t>
+            </a:r>
+          </a:p>
+        </p:txBody>
+      </p:sp>
+      <p:sp>
+        <p:nvSpPr>
+          <p:cNvPr id="8" name="Oval 7"/>
+          <p:cNvSpPr/>
+          <p:nvPr/>
+        </p:nvSpPr>
+        <p:spPr>
+          <a:xfrm>
+            <a:off x="548640" y="3212592"/>
+            <a:ext cx="411480" cy="411480"/>
+          </a:xfrm>
+          <a:prstGeom prst="ellipse">
+            <a:avLst/>
+          </a:prstGeom>
+          <a:solidFill>
+            <a:srgbClr val="E0463A"/>
+          </a:solidFill>
+          <a:ln>
+            <a:noFill/>
+          </a:ln>
+          <a:effectLst/>
+        </p:spPr>
+        <p:style>
+          <a:lnRef idx="1">
+            <a:schemeClr val="accent1"/>
+          </a:lnRef>
+          <a:fillRef idx="3">
+            <a:schemeClr val="accent1"/>
+          </a:fillRef>
+          <a:effectRef idx="2">
+            <a:schemeClr val="accent1"/>
+          </a:effectRef>
+          <a:fontRef idx="minor">
+            <a:schemeClr val="lt1"/>
+          </a:fontRef>
+        </p:style>
+        <p:txBody>
+          <a:bodyPr rtlCol="0" anchor="ctr" lIns="0" rIns="0" tIns="0" bIns="0"/>
+          <a:lstStyle/>
+          <a:p>
+            <a:pPr algn="ctr"/>
+            <a:r>
+              <a:rPr sz="1400" b="1">
+                <a:solidFill>
+                  <a:srgbClr val="FFFFFF"/>
+                </a:solidFill>
+                <a:latin typeface="Calibri"/>
+              </a:rPr>
+              <a:t>2</a:t>
+            </a:r>
+          </a:p>
+        </p:txBody>
+      </p:sp>
+      <p:sp>
+        <p:nvSpPr>
+          <p:cNvPr id="9" name="TextBox 8"/>
+          <p:cNvSpPr txBox="1"/>
+          <p:nvPr/>
+        </p:nvSpPr>
+        <p:spPr>
+          <a:xfrm>
+            <a:off x="1234440" y="3194304"/>
+            <a:ext cx="10408615" cy="1429512"/>
+          </a:xfrm>
+          <a:prstGeom prst="rect">
+            <a:avLst/>
+          </a:prstGeom>
+          <a:noFill/>
+        </p:spPr>
+        <p:txBody>
+          <a:bodyPr wrap="square" anchor="t" lIns="0" rIns="0" tIns="0" bIns="0"/>
+          <a:lstStyle/>
+          <a:p>
+            <a:pPr algn="l"/>
+            <a:r>
+              <a:rPr sz="1800" b="0" i="0">
+                <a:solidFill>
+                  <a:srgbClr val="54595D"/>
+                </a:solidFill>
+                <a:latin typeface="Calibri"/>
+              </a:rPr>
+              <a:t>What is an interface in system integration?</a:t>
+            </a:r>
+          </a:p>
+          <a:p>
+            <a:r>
+              <a:rPr sz="1800" b="1">
+                <a:solidFill>
+                  <a:srgbClr val="03306E"/>
+                </a:solidFill>
+                <a:latin typeface="Calibri"/>
+              </a:rPr>
+              <a:t>A point where two sub-systems connect or interact.</a:t>
+            </a:r>
+          </a:p>
+        </p:txBody>
+      </p:sp>
+      <p:sp>
+        <p:nvSpPr>
+          <p:cNvPr id="10" name="Oval 9"/>
+          <p:cNvSpPr/>
+          <p:nvPr/>
+        </p:nvSpPr>
+        <p:spPr>
+          <a:xfrm>
+            <a:off x="548640" y="4806695"/>
+            <a:ext cx="411480" cy="411480"/>
+          </a:xfrm>
+          <a:prstGeom prst="ellipse">
+            <a:avLst/>
+          </a:prstGeom>
+          <a:solidFill>
+            <a:srgbClr val="E0463A"/>
+          </a:solidFill>
+          <a:ln>
+            <a:noFill/>
+          </a:ln>
+          <a:effectLst/>
+        </p:spPr>
+        <p:style>
+          <a:lnRef idx="1">
+            <a:schemeClr val="accent1"/>
+          </a:lnRef>
+          <a:fillRef idx="3">
+            <a:schemeClr val="accent1"/>
+          </a:fillRef>
+          <a:effectRef idx="2">
+            <a:schemeClr val="accent1"/>
+          </a:effectRef>
+          <a:fontRef idx="minor">
+            <a:schemeClr val="lt1"/>
+          </a:fontRef>
+        </p:style>
+        <p:txBody>
+          <a:bodyPr rtlCol="0" anchor="ctr" lIns="0" rIns="0" tIns="0" bIns="0"/>
+          <a:lstStyle/>
+          <a:p>
+            <a:pPr algn="ctr"/>
+            <a:r>
+              <a:rPr sz="1400" b="1">
+                <a:solidFill>
+                  <a:srgbClr val="FFFFFF"/>
+                </a:solidFill>
+                <a:latin typeface="Calibri"/>
+              </a:rPr>
+              <a:t>3</a:t>
+            </a:r>
+          </a:p>
+        </p:txBody>
+      </p:sp>
+      <p:sp>
+        <p:nvSpPr>
+          <p:cNvPr id="11" name="TextBox 10"/>
+          <p:cNvSpPr txBox="1"/>
+          <p:nvPr/>
+        </p:nvSpPr>
+        <p:spPr>
+          <a:xfrm>
+            <a:off x="1234440" y="4788408"/>
+            <a:ext cx="10408615" cy="1429512"/>
+          </a:xfrm>
+          <a:prstGeom prst="rect">
+            <a:avLst/>
+          </a:prstGeom>
+          <a:noFill/>
+        </p:spPr>
+        <p:txBody>
+          <a:bodyPr wrap="square" anchor="t" lIns="0" rIns="0" tIns="0" bIns="0"/>
+          <a:lstStyle/>
+          <a:p>
+            <a:pPr algn="l"/>
+            <a:r>
+              <a:rPr sz="1800" b="0" i="0">
+                <a:solidFill>
+                  <a:srgbClr val="54595D"/>
+                </a:solidFill>
+                <a:latin typeface="Calibri"/>
+              </a:rPr>
+              <a:t>Why test interfaces before the whole system?</a:t>
+            </a:r>
+          </a:p>
+          <a:p>
+            <a:r>
+              <a:rPr sz="1800" b="1">
+                <a:solidFill>
+                  <a:srgbClr val="03306E"/>
+                </a:solidFill>
+                <a:latin typeface="Calibri"/>
+              </a:rPr>
+              <a:t>Faults are easier to find and fix.</a:t>
+            </a:r>
+          </a:p>
+        </p:txBody>
+      </p:sp>
+    </p:spTree>
+  </p:cSld>
+  <p:clrMapOvr>
+    <a:masterClrMapping/>
+  </p:clrMapOvr>
+</p:sld>
+</file>
+
+<file path=ppt/slides/slide11.xml><?xml version="1.0" encoding="utf-8"?>
+<p:sld xmlns:a="http://schemas.openxmlformats.org/drawingml/2006/main" xmlns:p="http://schemas.openxmlformats.org/presentationml/2006/main" xmlns:r="http://schemas.openxmlformats.org/officeDocument/2006/relationships">
+  <p:cSld>
+    <p:bg>
+      <p:bgPr>
+        <a:solidFill>
+          <a:srgbClr val="FFFFFF"/>
+        </a:solidFill>
+        <a:effectLst/>
+      </p:bgPr>
+    </p:bg>
+    <p:spTree>
+      <p:nvGrpSpPr>
+        <p:cNvPr id="1" name=""/>
+        <p:cNvGrpSpPr/>
+        <p:nvPr/>
+      </p:nvGrpSpPr>
+      <p:grpSpPr/>
+      <p:sp>
+        <p:nvSpPr>
+          <p:cNvPr id="2" name="TextBox 1"/>
+          <p:cNvSpPr txBox="1"/>
+          <p:nvPr/>
+        </p:nvSpPr>
+        <p:spPr>
+          <a:xfrm>
+            <a:off x="548640" y="320040"/>
+            <a:ext cx="11094415" cy="274320"/>
+          </a:xfrm>
+          <a:prstGeom prst="rect">
+            <a:avLst/>
+          </a:prstGeom>
+          <a:noFill/>
+        </p:spPr>
+        <p:txBody>
+          <a:bodyPr wrap="square" anchor="t" lIns="0" rIns="0" tIns="0" bIns="0"/>
+          <a:lstStyle/>
+          <a:p>
+            <a:pPr algn="l"/>
+            <a:r>
+              <a:rPr sz="1100" b="1" i="0">
+                <a:solidFill>
+                  <a:srgbClr val="54595D"/>
+                </a:solidFill>
+                <a:latin typeface="Calibri"/>
+              </a:rPr>
+              <a:t>MECHANICAL ENGINEERING  ·  Mechanical: Knowledge criteria</a:t>
+            </a:r>
+          </a:p>
+        </p:txBody>
+      </p:sp>
+      <p:sp>
+        <p:nvSpPr>
+          <p:cNvPr id="3" name="TextBox 2"/>
+          <p:cNvSpPr txBox="1"/>
+          <p:nvPr/>
+        </p:nvSpPr>
+        <p:spPr>
+          <a:xfrm>
+            <a:off x="548640" y="566928"/>
+            <a:ext cx="11094415" cy="822960"/>
+          </a:xfrm>
+          <a:prstGeom prst="rect">
+            <a:avLst/>
+          </a:prstGeom>
+          <a:noFill/>
+        </p:spPr>
+        <p:txBody>
+          <a:bodyPr wrap="square" anchor="ctr" lIns="0" rIns="0" tIns="0" bIns="0"/>
+          <a:lstStyle/>
+          <a:p>
+            <a:pPr algn="l"/>
+            <a:r>
+              <a:rPr sz="3200" b="1" i="0">
+                <a:solidFill>
+                  <a:srgbClr val="03306E"/>
+                </a:solidFill>
+                <a:latin typeface="Cambria"/>
+              </a:rPr>
+              <a:t>Activity: Integration plan</a:t>
+            </a:r>
+          </a:p>
+        </p:txBody>
+      </p:sp>
+      <p:sp>
+        <p:nvSpPr>
+          <p:cNvPr id="4" name="TextBox 3"/>
+          <p:cNvSpPr txBox="1"/>
+          <p:nvPr/>
+        </p:nvSpPr>
+        <p:spPr>
+          <a:xfrm>
+            <a:off x="548640" y="6446520"/>
+            <a:ext cx="8229600" cy="274320"/>
+          </a:xfrm>
+          <a:prstGeom prst="rect">
+            <a:avLst/>
+          </a:prstGeom>
+          <a:noFill/>
+        </p:spPr>
+        <p:txBody>
+          <a:bodyPr wrap="square" anchor="t" lIns="0" rIns="0" tIns="0" bIns="0"/>
+          <a:lstStyle/>
+          <a:p>
+            <a:pPr algn="l"/>
+            <a:r>
+              <a:rPr sz="1000" b="0" i="0">
+                <a:solidFill>
+                  <a:srgbClr val="54595D"/>
+                </a:solidFill>
+                <a:latin typeface="Calibri"/>
+              </a:rPr>
+              <a:t>Design and Development for Engineering and Manufacturing T Level  ·  Installation and Integration of Systems</a:t>
+            </a:r>
+          </a:p>
+        </p:txBody>
+      </p:sp>
+      <p:sp>
+        <p:nvSpPr>
+          <p:cNvPr id="5" name="TextBox 4"/>
+          <p:cNvSpPr txBox="1"/>
+          <p:nvPr/>
+        </p:nvSpPr>
+        <p:spPr>
+          <a:xfrm>
+            <a:off x="10728655" y="6446520"/>
+            <a:ext cx="914400" cy="274320"/>
+          </a:xfrm>
+          <a:prstGeom prst="rect">
+            <a:avLst/>
+          </a:prstGeom>
+          <a:noFill/>
+        </p:spPr>
+        <p:txBody>
+          <a:bodyPr wrap="square" anchor="t" lIns="0" rIns="0" tIns="0" bIns="0"/>
+          <a:lstStyle/>
+          <a:p>
+            <a:pPr algn="r"/>
+            <a:r>
+              <a:rPr sz="1000" b="0" i="0">
+                <a:solidFill>
+                  <a:srgbClr val="54595D"/>
+                </a:solidFill>
+                <a:latin typeface="Calibri"/>
+              </a:rPr>
+              <a:t>11</a:t>
+            </a:r>
+          </a:p>
+        </p:txBody>
+      </p:sp>
+      <p:sp>
+        <p:nvSpPr>
+          <p:cNvPr id="6" name="Rounded Rectangle 5"/>
+          <p:cNvSpPr/>
+          <p:nvPr/>
+        </p:nvSpPr>
+        <p:spPr>
+          <a:xfrm>
+            <a:off x="548640" y="1508760"/>
+            <a:ext cx="2011680" cy="457200"/>
+          </a:xfrm>
+          <a:prstGeom prst="roundRect">
+            <a:avLst>
+              <a:gd name="adj" fmla="val 50000"/>
+            </a:avLst>
+          </a:prstGeom>
+          <a:solidFill>
+            <a:srgbClr val="E0463A"/>
+          </a:solidFill>
+          <a:ln>
+            <a:noFill/>
+          </a:ln>
+          <a:effectLst/>
+        </p:spPr>
+        <p:style>
+          <a:lnRef idx="1">
+            <a:schemeClr val="accent1"/>
+          </a:lnRef>
+          <a:fillRef idx="3">
+            <a:schemeClr val="accent1"/>
+          </a:fillRef>
+          <a:effectRef idx="2">
+            <a:schemeClr val="accent1"/>
+          </a:effectRef>
+          <a:fontRef idx="minor">
+            <a:schemeClr val="lt1"/>
+          </a:fontRef>
+        </p:style>
+        <p:txBody>
+          <a:bodyPr rtlCol="0" anchor="ctr"/>
+          <a:lstStyle/>
+          <a:p/>
+        </p:txBody>
+      </p:sp>
+      <p:sp>
+        <p:nvSpPr>
+          <p:cNvPr id="7" name="TextBox 6"/>
+          <p:cNvSpPr txBox="1"/>
+          <p:nvPr/>
+        </p:nvSpPr>
+        <p:spPr>
+          <a:xfrm>
+            <a:off x="548640" y="1508760"/>
+            <a:ext cx="2011680" cy="457200"/>
+          </a:xfrm>
+          <a:prstGeom prst="rect">
+            <a:avLst/>
+          </a:prstGeom>
+          <a:noFill/>
+        </p:spPr>
+        <p:txBody>
+          <a:bodyPr wrap="square" anchor="ctr" lIns="0" rIns="0" tIns="0" bIns="0"/>
+          <a:lstStyle/>
+          <a:p>
+            <a:pPr algn="ctr"/>
+            <a:r>
+              <a:rPr sz="1400" b="1" i="0">
+                <a:solidFill>
+                  <a:srgbClr val="FFFFFF"/>
+                </a:solidFill>
+                <a:latin typeface="Calibri"/>
+              </a:rPr>
+              <a:t>20 minutes</a:t>
+            </a:r>
+          </a:p>
+        </p:txBody>
+      </p:sp>
+      <p:sp>
+        <p:nvSpPr>
+          <p:cNvPr id="8" name="TextBox 7"/>
+          <p:cNvSpPr txBox="1"/>
+          <p:nvPr/>
+        </p:nvSpPr>
+        <p:spPr>
+          <a:xfrm>
+            <a:off x="2743200" y="1508760"/>
+            <a:ext cx="4754880" cy="457200"/>
+          </a:xfrm>
+          <a:prstGeom prst="rect">
+            <a:avLst/>
+          </a:prstGeom>
+          <a:noFill/>
+        </p:spPr>
+        <p:txBody>
+          <a:bodyPr wrap="square" anchor="ctr" lIns="0" rIns="0" tIns="0" bIns="0"/>
+          <a:lstStyle/>
+          <a:p>
+            <a:pPr algn="l"/>
+            <a:r>
+              <a:rPr sz="1400" b="0" i="1">
+                <a:solidFill>
+                  <a:srgbClr val="54595D"/>
+                </a:solidFill>
+                <a:latin typeface="Calibri"/>
+              </a:rPr>
+              <a:t>Pairs</a:t>
+            </a:r>
+          </a:p>
+        </p:txBody>
+      </p:sp>
+      <p:sp>
+        <p:nvSpPr>
+          <p:cNvPr id="9" name="Oval 8"/>
+          <p:cNvSpPr/>
+          <p:nvPr/>
+        </p:nvSpPr>
+        <p:spPr>
+          <a:xfrm>
+            <a:off x="548640" y="2482596"/>
+            <a:ext cx="384048" cy="384048"/>
+          </a:xfrm>
+          <a:prstGeom prst="ellipse">
+            <a:avLst/>
+          </a:prstGeom>
+          <a:solidFill>
+            <a:srgbClr val="0645AD"/>
+          </a:solidFill>
+          <a:ln>
+            <a:noFill/>
+          </a:ln>
+          <a:effectLst/>
+        </p:spPr>
+        <p:style>
+          <a:lnRef idx="1">
+            <a:schemeClr val="accent1"/>
+          </a:lnRef>
+          <a:fillRef idx="3">
+            <a:schemeClr val="accent1"/>
+          </a:fillRef>
+          <a:effectRef idx="2">
+            <a:schemeClr val="accent1"/>
+          </a:effectRef>
+          <a:fontRef idx="minor">
+            <a:schemeClr val="lt1"/>
+          </a:fontRef>
+        </p:style>
+        <p:txBody>
+          <a:bodyPr rtlCol="0" anchor="ctr" lIns="0" rIns="0" tIns="0" bIns="0"/>
+          <a:lstStyle/>
+          <a:p>
+            <a:pPr algn="ctr"/>
+            <a:r>
+              <a:rPr sz="1300" b="1">
+                <a:solidFill>
+                  <a:srgbClr val="FFFFFF"/>
+                </a:solidFill>
+                <a:latin typeface="Calibri"/>
+              </a:rPr>
+              <a:t>1</a:t>
+            </a:r>
+          </a:p>
+        </p:txBody>
+      </p:sp>
+      <p:sp>
+        <p:nvSpPr>
+          <p:cNvPr id="10" name="TextBox 9"/>
+          <p:cNvSpPr txBox="1"/>
+          <p:nvPr/>
+        </p:nvSpPr>
+        <p:spPr>
+          <a:xfrm>
+            <a:off x="1143000" y="2240280"/>
+            <a:ext cx="5943600" cy="868680"/>
+          </a:xfrm>
+          <a:prstGeom prst="rect">
+            <a:avLst/>
+          </a:prstGeom>
+          <a:noFill/>
+        </p:spPr>
+        <p:txBody>
+          <a:bodyPr wrap="square" anchor="ctr" lIns="0" rIns="0" tIns="0" bIns="0"/>
+          <a:lstStyle/>
+          <a:p>
+            <a:pPr algn="l"/>
+            <a:r>
+              <a:rPr sz="1700" b="0" i="0">
+                <a:solidFill>
+                  <a:srgbClr val="202122"/>
+                </a:solidFill>
+                <a:latin typeface="Calibri"/>
+              </a:rPr>
+              <a:t>Take the conveyor from the starter.</a:t>
+            </a:r>
+          </a:p>
+        </p:txBody>
+      </p:sp>
+      <p:sp>
+        <p:nvSpPr>
+          <p:cNvPr id="11" name="Oval 10"/>
+          <p:cNvSpPr/>
+          <p:nvPr/>
+        </p:nvSpPr>
+        <p:spPr>
+          <a:xfrm>
+            <a:off x="548640" y="3461004"/>
+            <a:ext cx="384048" cy="384048"/>
+          </a:xfrm>
+          <a:prstGeom prst="ellipse">
+            <a:avLst/>
+          </a:prstGeom>
+          <a:solidFill>
+            <a:srgbClr val="0645AD"/>
+          </a:solidFill>
+          <a:ln>
+            <a:noFill/>
+          </a:ln>
+          <a:effectLst/>
+        </p:spPr>
+        <p:style>
+          <a:lnRef idx="1">
+            <a:schemeClr val="accent1"/>
+          </a:lnRef>
+          <a:fillRef idx="3">
+            <a:schemeClr val="accent1"/>
+          </a:fillRef>
+          <a:effectRef idx="2">
+            <a:schemeClr val="accent1"/>
+          </a:effectRef>
+          <a:fontRef idx="minor">
+            <a:schemeClr val="lt1"/>
+          </a:fontRef>
+        </p:style>
+        <p:txBody>
+          <a:bodyPr rtlCol="0" anchor="ctr" lIns="0" rIns="0" tIns="0" bIns="0"/>
+          <a:lstStyle/>
+          <a:p>
+            <a:pPr algn="ctr"/>
+            <a:r>
+              <a:rPr sz="1300" b="1">
+                <a:solidFill>
+                  <a:srgbClr val="FFFFFF"/>
+                </a:solidFill>
+                <a:latin typeface="Calibri"/>
+              </a:rPr>
+              <a:t>2</a:t>
+            </a:r>
+          </a:p>
+        </p:txBody>
+      </p:sp>
+      <p:sp>
+        <p:nvSpPr>
+          <p:cNvPr id="12" name="TextBox 11"/>
+          <p:cNvSpPr txBox="1"/>
+          <p:nvPr/>
+        </p:nvSpPr>
+        <p:spPr>
+          <a:xfrm>
+            <a:off x="1143000" y="3218688"/>
+            <a:ext cx="5943600" cy="868680"/>
+          </a:xfrm>
+          <a:prstGeom prst="rect">
+            <a:avLst/>
+          </a:prstGeom>
+          <a:noFill/>
+        </p:spPr>
+        <p:txBody>
+          <a:bodyPr wrap="square" anchor="ctr" lIns="0" rIns="0" tIns="0" bIns="0"/>
+          <a:lstStyle/>
+          <a:p>
+            <a:pPr algn="l"/>
+            <a:r>
+              <a:rPr sz="1700" b="0" i="0">
+                <a:solidFill>
+                  <a:srgbClr val="202122"/>
+                </a:solidFill>
+                <a:latin typeface="Calibri"/>
+              </a:rPr>
+              <a:t>List its sub-systems and interfaces.</a:t>
+            </a:r>
+          </a:p>
+        </p:txBody>
+      </p:sp>
+      <p:sp>
+        <p:nvSpPr>
+          <p:cNvPr id="13" name="Oval 12"/>
+          <p:cNvSpPr/>
+          <p:nvPr/>
+        </p:nvSpPr>
+        <p:spPr>
+          <a:xfrm>
+            <a:off x="548640" y="4439412"/>
+            <a:ext cx="384048" cy="384048"/>
+          </a:xfrm>
+          <a:prstGeom prst="ellipse">
+            <a:avLst/>
+          </a:prstGeom>
+          <a:solidFill>
+            <a:srgbClr val="0645AD"/>
+          </a:solidFill>
+          <a:ln>
+            <a:noFill/>
+          </a:ln>
+          <a:effectLst/>
+        </p:spPr>
+        <p:style>
+          <a:lnRef idx="1">
+            <a:schemeClr val="accent1"/>
+          </a:lnRef>
+          <a:fillRef idx="3">
+            <a:schemeClr val="accent1"/>
+          </a:fillRef>
+          <a:effectRef idx="2">
+            <a:schemeClr val="accent1"/>
+          </a:effectRef>
+          <a:fontRef idx="minor">
+            <a:schemeClr val="lt1"/>
+          </a:fontRef>
+        </p:style>
+        <p:txBody>
+          <a:bodyPr rtlCol="0" anchor="ctr" lIns="0" rIns="0" tIns="0" bIns="0"/>
+          <a:lstStyle/>
+          <a:p>
+            <a:pPr algn="ctr"/>
+            <a:r>
+              <a:rPr sz="1300" b="1">
+                <a:solidFill>
+                  <a:srgbClr val="FFFFFF"/>
+                </a:solidFill>
+                <a:latin typeface="Calibri"/>
+              </a:rPr>
+              <a:t>3</a:t>
+            </a:r>
+          </a:p>
+        </p:txBody>
+      </p:sp>
+      <p:sp>
+        <p:nvSpPr>
+          <p:cNvPr id="14" name="TextBox 13"/>
+          <p:cNvSpPr txBox="1"/>
+          <p:nvPr/>
+        </p:nvSpPr>
+        <p:spPr>
+          <a:xfrm>
+            <a:off x="1143000" y="4197096"/>
+            <a:ext cx="5943600" cy="868680"/>
+          </a:xfrm>
+          <a:prstGeom prst="rect">
+            <a:avLst/>
+          </a:prstGeom>
+          <a:noFill/>
+        </p:spPr>
+        <p:txBody>
+          <a:bodyPr wrap="square" anchor="ctr" lIns="0" rIns="0" tIns="0" bIns="0"/>
+          <a:lstStyle/>
+          <a:p>
+            <a:pPr algn="l"/>
+            <a:r>
+              <a:rPr sz="1700" b="0" i="0">
+                <a:solidFill>
+                  <a:srgbClr val="202122"/>
+                </a:solidFill>
+                <a:latin typeface="Calibri"/>
+              </a:rPr>
+              <a:t>Put the integration steps in order.</a:t>
+            </a:r>
+          </a:p>
+        </p:txBody>
+      </p:sp>
+      <p:sp>
+        <p:nvSpPr>
+          <p:cNvPr id="15" name="Oval 14"/>
+          <p:cNvSpPr/>
+          <p:nvPr/>
+        </p:nvSpPr>
+        <p:spPr>
+          <a:xfrm>
+            <a:off x="548640" y="5417820"/>
+            <a:ext cx="384048" cy="384048"/>
+          </a:xfrm>
+          <a:prstGeom prst="ellipse">
+            <a:avLst/>
+          </a:prstGeom>
+          <a:solidFill>
+            <a:srgbClr val="0645AD"/>
+          </a:solidFill>
+          <a:ln>
+            <a:noFill/>
+          </a:ln>
+          <a:effectLst/>
+        </p:spPr>
+        <p:style>
+          <a:lnRef idx="1">
+            <a:schemeClr val="accent1"/>
+          </a:lnRef>
+          <a:fillRef idx="3">
+            <a:schemeClr val="accent1"/>
+          </a:fillRef>
+          <a:effectRef idx="2">
+            <a:schemeClr val="accent1"/>
+          </a:effectRef>
+          <a:fontRef idx="minor">
+            <a:schemeClr val="lt1"/>
+          </a:fontRef>
+        </p:style>
+        <p:txBody>
+          <a:bodyPr rtlCol="0" anchor="ctr" lIns="0" rIns="0" tIns="0" bIns="0"/>
+          <a:lstStyle/>
+          <a:p>
+            <a:pPr algn="ctr"/>
+            <a:r>
+              <a:rPr sz="1300" b="1">
+                <a:solidFill>
+                  <a:srgbClr val="FFFFFF"/>
+                </a:solidFill>
+                <a:latin typeface="Calibri"/>
+              </a:rPr>
+              <a:t>4</a:t>
+            </a:r>
+          </a:p>
+        </p:txBody>
+      </p:sp>
+      <p:sp>
+        <p:nvSpPr>
+          <p:cNvPr id="16" name="TextBox 15"/>
+          <p:cNvSpPr txBox="1"/>
+          <p:nvPr/>
+        </p:nvSpPr>
+        <p:spPr>
+          <a:xfrm>
+            <a:off x="1143000" y="5175504"/>
+            <a:ext cx="5943600" cy="868680"/>
+          </a:xfrm>
+          <a:prstGeom prst="rect">
+            <a:avLst/>
+          </a:prstGeom>
+          <a:noFill/>
+        </p:spPr>
+        <p:txBody>
+          <a:bodyPr wrap="square" anchor="ctr" lIns="0" rIns="0" tIns="0" bIns="0"/>
+          <a:lstStyle/>
+          <a:p>
+            <a:pPr algn="l"/>
+            <a:r>
+              <a:rPr sz="1700" b="0" i="0">
+                <a:solidFill>
+                  <a:srgbClr val="202122"/>
+                </a:solidFill>
+                <a:latin typeface="Calibri"/>
+              </a:rPr>
+              <a:t>Write a test for each interface.</a:t>
+            </a:r>
+          </a:p>
+        </p:txBody>
+      </p:sp>
+      <p:sp>
+        <p:nvSpPr>
+          <p:cNvPr id="17" name="Rounded Rectangle 16"/>
+          <p:cNvSpPr/>
+          <p:nvPr/>
+        </p:nvSpPr>
+        <p:spPr>
+          <a:xfrm>
+            <a:off x="7772400" y="1508760"/>
+            <a:ext cx="3867912" cy="4572000"/>
+          </a:xfrm>
+          <a:prstGeom prst="roundRect">
+            <a:avLst>
+              <a:gd name="adj" fmla="val 8000"/>
+            </a:avLst>
+          </a:prstGeom>
+          <a:solidFill>
+            <a:srgbClr val="EAF3FF"/>
+          </a:solidFill>
+          <a:ln>
+            <a:noFill/>
+          </a:ln>
+          <a:effectLst/>
+        </p:spPr>
+        <p:style>
+          <a:lnRef idx="1">
+            <a:schemeClr val="accent1"/>
+          </a:lnRef>
+          <a:fillRef idx="3">
+            <a:schemeClr val="accent1"/>
+          </a:fillRef>
+          <a:effectRef idx="2">
+            <a:schemeClr val="accent1"/>
+          </a:effectRef>
+          <a:fontRef idx="minor">
+            <a:schemeClr val="lt1"/>
+          </a:fontRef>
+        </p:style>
+        <p:txBody>
+          <a:bodyPr rtlCol="0" anchor="ctr"/>
+          <a:lstStyle/>
+          <a:p/>
+        </p:txBody>
+      </p:sp>
+      <p:sp>
+        <p:nvSpPr>
+          <p:cNvPr id="18" name="TextBox 17"/>
+          <p:cNvSpPr txBox="1"/>
+          <p:nvPr/>
+        </p:nvSpPr>
+        <p:spPr>
+          <a:xfrm>
+            <a:off x="8046720" y="1737360"/>
+            <a:ext cx="3291840" cy="365760"/>
+          </a:xfrm>
+          <a:prstGeom prst="rect">
+            <a:avLst/>
+          </a:prstGeom>
+          <a:noFill/>
+        </p:spPr>
+        <p:txBody>
+          <a:bodyPr wrap="square" anchor="t" lIns="0" rIns="0" tIns="0" bIns="0"/>
+          <a:lstStyle/>
+          <a:p>
+            <a:pPr algn="l"/>
+            <a:r>
+              <a:rPr sz="1300" b="1" i="0">
+                <a:solidFill>
+                  <a:srgbClr val="0645AD"/>
+                </a:solidFill>
+                <a:latin typeface="Calibri"/>
+              </a:rPr>
+              <a:t>SUCCESS CRITERIA</a:t>
+            </a:r>
+          </a:p>
+        </p:txBody>
+      </p:sp>
+      <p:sp>
+        <p:nvSpPr>
+          <p:cNvPr id="19" name="TextBox 18"/>
+          <p:cNvSpPr txBox="1"/>
+          <p:nvPr/>
+        </p:nvSpPr>
+        <p:spPr>
+          <a:xfrm>
+            <a:off x="8046720" y="2240280"/>
+            <a:ext cx="3337560" cy="3657600"/>
+          </a:xfrm>
+          <a:prstGeom prst="rect">
+            <a:avLst/>
+          </a:prstGeom>
+          <a:noFill/>
+        </p:spPr>
+        <p:txBody>
+          <a:bodyPr wrap="square" lIns="0" rIns="0" tIns="0" bIns="0">
+            <a:spAutoFit/>
+          </a:bodyPr>
+          <a:lstStyle/>
+          <a:p>
+            <a:pPr marL="274320" indent="-274320">
+              <a:spcAft>
+                <a:spcPts val="810"/>
+              </a:spcAft>
+              <a:buClr>
+                <a:srgbClr val="0645AD"/>
+              </a:buClr>
+              <a:buFont typeface="Arial"/>
+              <a:buChar char="•"/>
+            </a:pPr>
+            <a:r>
+              <a:rPr sz="1800" b="0">
+                <a:solidFill>
+                  <a:srgbClr val="202122"/>
+                </a:solidFill>
+                <a:latin typeface="Calibri"/>
+              </a:rPr>
+              <a:t>All interfaces identified</a:t>
+            </a:r>
+          </a:p>
+          <a:p>
+            <a:pPr marL="274320" indent="-274320">
+              <a:spcAft>
+                <a:spcPts val="810"/>
+              </a:spcAft>
+              <a:buClr>
+                <a:srgbClr val="0645AD"/>
+              </a:buClr>
+              <a:buFont typeface="Arial"/>
+              <a:buChar char="•"/>
+            </a:pPr>
+            <a:r>
+              <a:rPr sz="1800" b="0">
+                <a:solidFill>
+                  <a:srgbClr val="202122"/>
+                </a:solidFill>
+                <a:latin typeface="Calibri"/>
+              </a:rPr>
+              <a:t>Logical sequence</a:t>
+            </a:r>
+          </a:p>
+          <a:p>
+            <a:pPr marL="274320" indent="-274320">
+              <a:spcAft>
+                <a:spcPts val="810"/>
+              </a:spcAft>
+              <a:buClr>
+                <a:srgbClr val="0645AD"/>
+              </a:buClr>
+              <a:buFont typeface="Arial"/>
+              <a:buChar char="•"/>
+            </a:pPr>
+            <a:r>
+              <a:rPr sz="1800" b="0">
+                <a:solidFill>
+                  <a:srgbClr val="202122"/>
+                </a:solidFill>
+                <a:latin typeface="Calibri"/>
+              </a:rPr>
+              <a:t>Tests are specific</a:t>
+            </a:r>
+          </a:p>
+        </p:txBody>
+      </p:sp>
+    </p:spTree>
+  </p:cSld>
+  <p:clrMapOvr>
+    <a:masterClrMapping/>
+  </p:clrMapOvr>
+</p:sld>
+</file>
+
+<file path=ppt/slides/slide12.xml><?xml version="1.0" encoding="utf-8"?>
+<p:sld xmlns:a="http://schemas.openxmlformats.org/drawingml/2006/main" xmlns:p="http://schemas.openxmlformats.org/presentationml/2006/main" xmlns:r="http://schemas.openxmlformats.org/officeDocument/2006/relationships">
+  <p:cSld>
+    <p:bg>
+      <p:bgPr>
+        <a:solidFill>
+          <a:srgbClr val="03306E"/>
+        </a:solidFill>
+        <a:effectLst/>
+      </p:bgPr>
+    </p:bg>
+    <p:spTree>
+      <p:nvGrpSpPr>
+        <p:cNvPr id="1" name=""/>
+        <p:cNvGrpSpPr/>
+        <p:nvPr/>
+      </p:nvGrpSpPr>
+      <p:grpSpPr/>
+      <p:sp>
+        <p:nvSpPr>
+          <p:cNvPr id="2" name="TextBox 1"/>
+          <p:cNvSpPr txBox="1"/>
+          <p:nvPr/>
+        </p:nvSpPr>
+        <p:spPr>
+          <a:xfrm>
+            <a:off x="548640" y="320040"/>
+            <a:ext cx="11094415" cy="274320"/>
+          </a:xfrm>
+          <a:prstGeom prst="rect">
+            <a:avLst/>
+          </a:prstGeom>
+          <a:noFill/>
+        </p:spPr>
+        <p:txBody>
+          <a:bodyPr wrap="square" anchor="t" lIns="0" rIns="0" tIns="0" bIns="0"/>
+          <a:lstStyle/>
+          <a:p>
+            <a:pPr algn="l"/>
+            <a:r>
+              <a:rPr sz="1100" b="1" i="0">
+                <a:solidFill>
+                  <a:srgbClr val="A9C8F0"/>
+                </a:solidFill>
+                <a:latin typeface="Calibri"/>
+              </a:rPr>
+              <a:t>MECHANICAL ENGINEERING  ·  Mechanical: Knowledge criteria</a:t>
+            </a:r>
+          </a:p>
+        </p:txBody>
+      </p:sp>
+      <p:sp>
+        <p:nvSpPr>
+          <p:cNvPr id="3" name="TextBox 2"/>
+          <p:cNvSpPr txBox="1"/>
+          <p:nvPr/>
+        </p:nvSpPr>
+        <p:spPr>
+          <a:xfrm>
+            <a:off x="548640" y="566928"/>
+            <a:ext cx="11094415" cy="822960"/>
+          </a:xfrm>
+          <a:prstGeom prst="rect">
+            <a:avLst/>
+          </a:prstGeom>
+          <a:noFill/>
+        </p:spPr>
+        <p:txBody>
+          <a:bodyPr wrap="square" anchor="ctr" lIns="0" rIns="0" tIns="0" bIns="0"/>
+          <a:lstStyle/>
+          <a:p>
+            <a:pPr algn="l"/>
+            <a:r>
+              <a:rPr sz="3200" b="1" i="0">
+                <a:solidFill>
+                  <a:srgbClr val="FFFFFF"/>
+                </a:solidFill>
+                <a:latin typeface="Cambria"/>
+              </a:rPr>
+              <a:t>Exit ticket</a:t>
+            </a:r>
+          </a:p>
+        </p:txBody>
+      </p:sp>
+      <p:sp>
+        <p:nvSpPr>
+          <p:cNvPr id="4" name="Oval 3"/>
+          <p:cNvSpPr/>
+          <p:nvPr/>
+        </p:nvSpPr>
+        <p:spPr>
+          <a:xfrm>
+            <a:off x="548640" y="1737360"/>
+            <a:ext cx="502920" cy="502920"/>
+          </a:xfrm>
+          <a:prstGeom prst="ellipse">
+            <a:avLst/>
+          </a:prstGeom>
+          <a:solidFill>
+            <a:srgbClr val="E0463A"/>
+          </a:solidFill>
+          <a:ln>
+            <a:noFill/>
+          </a:ln>
+          <a:effectLst/>
+        </p:spPr>
+        <p:style>
+          <a:lnRef idx="1">
+            <a:schemeClr val="accent1"/>
+          </a:lnRef>
+          <a:fillRef idx="3">
+            <a:schemeClr val="accent1"/>
+          </a:fillRef>
+          <a:effectRef idx="2">
+            <a:schemeClr val="accent1"/>
+          </a:effectRef>
+          <a:fontRef idx="minor">
+            <a:schemeClr val="lt1"/>
+          </a:fontRef>
+        </p:style>
+        <p:txBody>
+          <a:bodyPr rtlCol="0" anchor="ctr" lIns="0" rIns="0" tIns="0" bIns="0"/>
+          <a:lstStyle/>
+          <a:p>
+            <a:pPr algn="ctr"/>
+            <a:r>
+              <a:rPr sz="1700" b="1">
+                <a:solidFill>
+                  <a:srgbClr val="FFFFFF"/>
+                </a:solidFill>
+                <a:latin typeface="Calibri"/>
+              </a:rPr>
+              <a:t>1</a:t>
+            </a:r>
+          </a:p>
+        </p:txBody>
+      </p:sp>
+      <p:sp>
+        <p:nvSpPr>
+          <p:cNvPr id="5" name="TextBox 4"/>
+          <p:cNvSpPr txBox="1"/>
+          <p:nvPr/>
+        </p:nvSpPr>
+        <p:spPr>
+          <a:xfrm>
+            <a:off x="1325880" y="1645920"/>
+            <a:ext cx="6583680" cy="822960"/>
+          </a:xfrm>
+          <a:prstGeom prst="rect">
+            <a:avLst/>
+          </a:prstGeom>
+          <a:noFill/>
+        </p:spPr>
+        <p:txBody>
+          <a:bodyPr wrap="square" anchor="ctr" lIns="0" rIns="0" tIns="0" bIns="0"/>
+          <a:lstStyle/>
+          <a:p>
+            <a:pPr algn="l"/>
+            <a:r>
+              <a:rPr sz="2000" b="0" i="0">
+                <a:solidFill>
+                  <a:srgbClr val="FFFFFF"/>
+                </a:solidFill>
+                <a:latin typeface="Calibri"/>
+              </a:rPr>
+              <a:t>Why follow the manufacturer's torque settings?</a:t>
+            </a:r>
+          </a:p>
+        </p:txBody>
+      </p:sp>
+      <p:sp>
+        <p:nvSpPr>
+          <p:cNvPr id="6" name="Oval 5"/>
+          <p:cNvSpPr/>
+          <p:nvPr/>
+        </p:nvSpPr>
+        <p:spPr>
+          <a:xfrm>
+            <a:off x="548640" y="2697480"/>
+            <a:ext cx="502920" cy="502920"/>
+          </a:xfrm>
+          <a:prstGeom prst="ellipse">
+            <a:avLst/>
+          </a:prstGeom>
+          <a:solidFill>
+            <a:srgbClr val="E0463A"/>
+          </a:solidFill>
+          <a:ln>
+            <a:noFill/>
+          </a:ln>
+          <a:effectLst/>
+        </p:spPr>
+        <p:style>
+          <a:lnRef idx="1">
+            <a:schemeClr val="accent1"/>
+          </a:lnRef>
+          <a:fillRef idx="3">
+            <a:schemeClr val="accent1"/>
+          </a:fillRef>
+          <a:effectRef idx="2">
+            <a:schemeClr val="accent1"/>
+          </a:effectRef>
+          <a:fontRef idx="minor">
+            <a:schemeClr val="lt1"/>
+          </a:fontRef>
+        </p:style>
+        <p:txBody>
+          <a:bodyPr rtlCol="0" anchor="ctr" lIns="0" rIns="0" tIns="0" bIns="0"/>
+          <a:lstStyle/>
+          <a:p>
+            <a:pPr algn="ctr"/>
+            <a:r>
+              <a:rPr sz="1700" b="1">
+                <a:solidFill>
+                  <a:srgbClr val="FFFFFF"/>
+                </a:solidFill>
+                <a:latin typeface="Calibri"/>
+              </a:rPr>
+              <a:t>2</a:t>
+            </a:r>
+          </a:p>
+        </p:txBody>
+      </p:sp>
+      <p:sp>
+        <p:nvSpPr>
+          <p:cNvPr id="7" name="TextBox 6"/>
+          <p:cNvSpPr txBox="1"/>
+          <p:nvPr/>
+        </p:nvSpPr>
+        <p:spPr>
+          <a:xfrm>
+            <a:off x="1325880" y="2606040"/>
+            <a:ext cx="6583680" cy="822960"/>
+          </a:xfrm>
+          <a:prstGeom prst="rect">
+            <a:avLst/>
+          </a:prstGeom>
+          <a:noFill/>
+        </p:spPr>
+        <p:txBody>
+          <a:bodyPr wrap="square" anchor="ctr" lIns="0" rIns="0" tIns="0" bIns="0"/>
+          <a:lstStyle/>
+          <a:p>
+            <a:pPr algn="l"/>
+            <a:r>
+              <a:rPr sz="2000" b="0" i="0">
+                <a:solidFill>
+                  <a:srgbClr val="FFFFFF"/>
+                </a:solidFill>
+                <a:latin typeface="Calibri"/>
+              </a:rPr>
+              <a:t>What happens during commissioning?</a:t>
+            </a:r>
+          </a:p>
+        </p:txBody>
+      </p:sp>
+      <p:sp>
+        <p:nvSpPr>
+          <p:cNvPr id="8" name="Oval 7"/>
+          <p:cNvSpPr/>
+          <p:nvPr/>
+        </p:nvSpPr>
+        <p:spPr>
+          <a:xfrm>
+            <a:off x="548640" y="3657600"/>
+            <a:ext cx="502920" cy="502920"/>
+          </a:xfrm>
+          <a:prstGeom prst="ellipse">
+            <a:avLst/>
+          </a:prstGeom>
+          <a:solidFill>
+            <a:srgbClr val="E0463A"/>
+          </a:solidFill>
+          <a:ln>
+            <a:noFill/>
+          </a:ln>
+          <a:effectLst/>
+        </p:spPr>
+        <p:style>
+          <a:lnRef idx="1">
+            <a:schemeClr val="accent1"/>
+          </a:lnRef>
+          <a:fillRef idx="3">
+            <a:schemeClr val="accent1"/>
+          </a:fillRef>
+          <a:effectRef idx="2">
+            <a:schemeClr val="accent1"/>
+          </a:effectRef>
+          <a:fontRef idx="minor">
+            <a:schemeClr val="lt1"/>
+          </a:fontRef>
+        </p:style>
+        <p:txBody>
+          <a:bodyPr rtlCol="0" anchor="ctr" lIns="0" rIns="0" tIns="0" bIns="0"/>
+          <a:lstStyle/>
+          <a:p>
+            <a:pPr algn="ctr"/>
+            <a:r>
+              <a:rPr sz="1700" b="1">
+                <a:solidFill>
+                  <a:srgbClr val="FFFFFF"/>
+                </a:solidFill>
+                <a:latin typeface="Calibri"/>
+              </a:rPr>
+              <a:t>3</a:t>
+            </a:r>
+          </a:p>
+        </p:txBody>
+      </p:sp>
+      <p:sp>
+        <p:nvSpPr>
+          <p:cNvPr id="9" name="TextBox 8"/>
+          <p:cNvSpPr txBox="1"/>
+          <p:nvPr/>
+        </p:nvSpPr>
+        <p:spPr>
+          <a:xfrm>
+            <a:off x="1325880" y="3566160"/>
+            <a:ext cx="6583680" cy="822960"/>
+          </a:xfrm>
+          <a:prstGeom prst="rect">
+            <a:avLst/>
+          </a:prstGeom>
+          <a:noFill/>
+        </p:spPr>
+        <p:txBody>
+          <a:bodyPr wrap="square" anchor="ctr" lIns="0" rIns="0" tIns="0" bIns="0"/>
+          <a:lstStyle/>
+          <a:p>
+            <a:pPr algn="l"/>
+            <a:r>
+              <a:rPr sz="2000" b="0" i="0">
+                <a:solidFill>
+                  <a:srgbClr val="FFFFFF"/>
+                </a:solidFill>
+                <a:latin typeface="Calibri"/>
+              </a:rPr>
+              <a:t>Who needs to sign off an installation?</a:t>
+            </a:r>
+          </a:p>
+        </p:txBody>
+      </p:sp>
+      <p:sp>
+        <p:nvSpPr>
+          <p:cNvPr id="10" name="Rounded Rectangle 9"/>
+          <p:cNvSpPr/>
+          <p:nvPr/>
+        </p:nvSpPr>
+        <p:spPr>
+          <a:xfrm>
+            <a:off x="8229600" y="1645920"/>
+            <a:ext cx="3410712" cy="2926080"/>
+          </a:xfrm>
+          <a:prstGeom prst="roundRect">
+            <a:avLst>
+              <a:gd name="adj" fmla="val 8000"/>
+            </a:avLst>
+          </a:prstGeom>
+          <a:solidFill>
+            <a:srgbClr val="0645AD"/>
+          </a:solidFill>
+          <a:ln>
+            <a:noFill/>
+          </a:ln>
+          <a:effectLst/>
+        </p:spPr>
+        <p:style>
+          <a:lnRef idx="1">
+            <a:schemeClr val="accent1"/>
+          </a:lnRef>
+          <a:fillRef idx="3">
+            <a:schemeClr val="accent1"/>
+          </a:fillRef>
+          <a:effectRef idx="2">
+            <a:schemeClr val="accent1"/>
+          </a:effectRef>
+          <a:fontRef idx="minor">
+            <a:schemeClr val="lt1"/>
+          </a:fontRef>
+        </p:style>
+        <p:txBody>
+          <a:bodyPr rtlCol="0" anchor="ctr"/>
+          <a:lstStyle/>
+          <a:p/>
+        </p:txBody>
+      </p:sp>
+      <p:sp>
+        <p:nvSpPr>
+          <p:cNvPr id="11" name="TextBox 10"/>
+          <p:cNvSpPr txBox="1"/>
+          <p:nvPr/>
+        </p:nvSpPr>
+        <p:spPr>
+          <a:xfrm>
+            <a:off x="8503920" y="1874519"/>
+            <a:ext cx="2926080" cy="365760"/>
+          </a:xfrm>
+          <a:prstGeom prst="rect">
+            <a:avLst/>
+          </a:prstGeom>
+          <a:noFill/>
+        </p:spPr>
+        <p:txBody>
+          <a:bodyPr wrap="square" anchor="t" lIns="0" rIns="0" tIns="0" bIns="0"/>
+          <a:lstStyle/>
+          <a:p>
+            <a:pPr algn="l"/>
+            <a:r>
+              <a:rPr sz="1300" b="1" i="0">
+                <a:solidFill>
+                  <a:srgbClr val="A9C8F0"/>
+                </a:solidFill>
+                <a:latin typeface="Calibri"/>
+              </a:rPr>
+              <a:t>REVISE THIS TOPIC</a:t>
+            </a:r>
+          </a:p>
+        </p:txBody>
+      </p:sp>
+      <p:sp>
+        <p:nvSpPr>
+          <p:cNvPr id="12" name="TextBox 11"/>
+          <p:cNvSpPr txBox="1"/>
+          <p:nvPr/>
+        </p:nvSpPr>
+        <p:spPr>
+          <a:xfrm>
+            <a:off x="8503920" y="2286000"/>
+            <a:ext cx="2926080" cy="548640"/>
+          </a:xfrm>
+          <a:prstGeom prst="rect">
+            <a:avLst/>
+          </a:prstGeom>
+          <a:noFill/>
+        </p:spPr>
+        <p:txBody>
+          <a:bodyPr wrap="square" anchor="t" lIns="0" rIns="0" tIns="0" bIns="0"/>
+          <a:lstStyle/>
+          <a:p>
+            <a:pPr algn="l"/>
+            <a:r>
+              <a:rPr sz="1400" b="0" i="0">
+                <a:solidFill>
+                  <a:srgbClr val="FFFFFF"/>
+                </a:solidFill>
+                <a:latin typeface="Calibri"/>
+              </a:rPr>
+              <a:t>Revision notes for this lesson are on the study wiki:</a:t>
+            </a:r>
+          </a:p>
+        </p:txBody>
+      </p:sp>
+      <p:sp>
+        <p:nvSpPr>
+          <p:cNvPr id="13" name="TextBox 12"/>
+          <p:cNvSpPr txBox="1"/>
+          <p:nvPr/>
+        </p:nvSpPr>
+        <p:spPr>
+          <a:xfrm>
+            <a:off x="8503920" y="2926080"/>
+            <a:ext cx="2926080" cy="1463040"/>
+          </a:xfrm>
+          <a:prstGeom prst="rect">
+            <a:avLst/>
+          </a:prstGeom>
+          <a:noFill/>
+        </p:spPr>
+        <p:txBody>
+          <a:bodyPr wrap="square" anchor="t" lIns="0" rIns="0" tIns="0" bIns="0"/>
+          <a:lstStyle/>
+          <a:p>
+            <a:pPr algn="l"/>
+            <a:r>
+              <a:rPr sz="2000" b="1" i="0">
+                <a:solidFill>
+                  <a:srgbClr val="FFFFFF"/>
+                </a:solidFill>
+                <a:latin typeface="Cambria"/>
+              </a:rPr>
+              <a:t>Knowledge Criteria</a:t>
+            </a:r>
+          </a:p>
+        </p:txBody>
+      </p:sp>
+      <p:sp>
+        <p:nvSpPr>
+          <p:cNvPr id="14" name="TextBox 13"/>
+          <p:cNvSpPr txBox="1"/>
+          <p:nvPr/>
+        </p:nvSpPr>
+        <p:spPr>
+          <a:xfrm>
+            <a:off x="548640" y="5669280"/>
+            <a:ext cx="11094415" cy="548640"/>
+          </a:xfrm>
+          <a:prstGeom prst="rect">
+            <a:avLst/>
+          </a:prstGeom>
+          <a:noFill/>
+        </p:spPr>
+        <p:txBody>
+          <a:bodyPr wrap="square" anchor="t" lIns="0" rIns="0" tIns="0" bIns="0"/>
+          <a:lstStyle/>
+          <a:p>
+            <a:pPr algn="l"/>
+            <a:r>
+              <a:rPr sz="1200" b="0" i="0">
+                <a:solidFill>
+                  <a:srgbClr val="A9C8F0"/>
+                </a:solidFill>
+                <a:latin typeface="Calibri"/>
+              </a:rPr>
+              <a:t>https://lana6478.github.io/T-level-Design-Development-Engineering-Manufacturing/#/02-occupational-specialism/01-knowledge-criteria.md</a:t>
+            </a:r>
+          </a:p>
+        </p:txBody>
+      </p:sp>
+    </p:spTree>
+  </p:cSld>
+  <p:clrMapOvr>
+    <a:masterClrMapping/>
+  </p:clrMapOvr>
+</p:sld>
+</file>
+
 <file path=ppt/slides/slide2.xml><?xml version="1.0" encoding="utf-8"?>
 <p:sld xmlns:a="http://schemas.openxmlformats.org/drawingml/2006/main" xmlns:p="http://schemas.openxmlformats.org/presentationml/2006/main" xmlns:r="http://schemas.openxmlformats.org/officeDocument/2006/relationships">
   <p:cSld>
@@ -4685,22 +6609,102 @@
       </p:sp>
       <p:sp>
         <p:nvSpPr>
-          <p:cNvPr id="6" name="Rounded Rectangle 5"/>
+          <p:cNvPr id="6" name="TextBox 5"/>
+          <p:cNvSpPr txBox="1"/>
+          <p:nvPr/>
+        </p:nvSpPr>
+        <p:spPr>
+          <a:xfrm>
+            <a:off x="548640" y="1554480"/>
+            <a:ext cx="6720840" cy="4617720"/>
+          </a:xfrm>
+          <a:prstGeom prst="rect">
+            <a:avLst/>
+          </a:prstGeom>
+          <a:noFill/>
+        </p:spPr>
+        <p:txBody>
+          <a:bodyPr wrap="square" lIns="0" rIns="0" tIns="0" bIns="0">
+            <a:spAutoFit/>
+          </a:bodyPr>
+          <a:lstStyle/>
+          <a:p>
+            <a:pPr>
+              <a:spcAft>
+                <a:spcPts val="1320"/>
+              </a:spcAft>
+            </a:pPr>
+            <a:r>
+              <a:rPr sz="2200" b="0">
+                <a:solidFill>
+                  <a:srgbClr val="202122"/>
+                </a:solidFill>
+                <a:latin typeface="Calibri"/>
+              </a:rPr>
+              <a:t>Installing a mechanical system must satisfy three sets of requirements.</a:t>
+            </a:r>
+          </a:p>
+          <a:p>
+            <a:pPr>
+              <a:spcAft>
+                <a:spcPts val="1320"/>
+              </a:spcAft>
+            </a:pPr>
+            <a:r>
+              <a:rPr sz="2200" b="1">
+                <a:solidFill>
+                  <a:srgbClr val="202122"/>
+                </a:solidFill>
+                <a:latin typeface="Calibri"/>
+              </a:rPr>
+              <a:t>Customer requirements:</a:t>
+            </a:r>
+            <a:r>
+              <a:rPr sz="2200" b="0">
+                <a:solidFill>
+                  <a:srgbClr val="202122"/>
+                </a:solidFill>
+                <a:latin typeface="Calibri"/>
+              </a:rPr>
+              <a:t> what the system must do on site, where it goes and how it will be used. Regulatory requirements: safety law and standards, such as PUWER and machinery safety rules. Manufacturer specifications: foundations, mounting, alignment, torque settings, clearances and connections.</a:t>
+            </a:r>
+          </a:p>
+          <a:p>
+            <a:pPr>
+              <a:spcAft>
+                <a:spcPts val="1320"/>
+              </a:spcAft>
+            </a:pPr>
+            <a:r>
+              <a:rPr sz="2200" b="0">
+                <a:solidFill>
+                  <a:srgbClr val="202122"/>
+                </a:solidFill>
+                <a:latin typeface="Calibri"/>
+              </a:rPr>
+              <a:t>Ignoring the manufacturer's specification can void the warranty and cause early failure.</a:t>
+            </a:r>
+          </a:p>
+        </p:txBody>
+      </p:sp>
+      <p:sp>
+        <p:nvSpPr>
+          <p:cNvPr id="7" name="Rounded Rectangle 6"/>
           <p:cNvSpPr/>
           <p:nvPr/>
         </p:nvSpPr>
         <p:spPr>
           <a:xfrm>
-            <a:off x="548640" y="1600200"/>
-            <a:ext cx="3515258" cy="4572000"/>
+            <a:off x="7772400" y="1554480"/>
+            <a:ext cx="3867912" cy="4526280"/>
           </a:xfrm>
           <a:prstGeom prst="roundRect">
             <a:avLst>
-              <a:gd name="adj" fmla="val 6000"/>
+              <a:gd name="adj" fmla="val 8000"/>
             </a:avLst>
           </a:prstGeom>
           <a:solidFill>
-            <a:srgbClr val="EAF3FF"/>
+            <a:srgbClr val="03306E"/>
           </a:solidFill>
           <a:ln>
             <a:noFill/>
@@ -4729,14 +6733,14 @@
       </p:sp>
       <p:sp>
         <p:nvSpPr>
-          <p:cNvPr id="7" name="Oval 6"/>
+          <p:cNvPr id="8" name="Oval 7"/>
           <p:cNvSpPr/>
           <p:nvPr/>
         </p:nvSpPr>
         <p:spPr>
           <a:xfrm>
-            <a:off x="777240" y="1828800"/>
-            <a:ext cx="457200" cy="457200"/>
+            <a:off x="8046720" y="1828800"/>
+            <a:ext cx="548640" cy="548640"/>
           </a:xfrm>
           <a:prstGeom prst="ellipse">
             <a:avLst/>
@@ -4769,46 +6773,13 @@
           <a:p>
             <a:pPr algn="ctr"/>
             <a:r>
-              <a:rPr sz="1500" b="1">
+              <a:rPr sz="1300" b="1">
                 <a:solidFill>
                   <a:srgbClr val="FFFFFF"/>
                 </a:solidFill>
                 <a:latin typeface="Calibri"/>
               </a:rPr>
-              <a:t>1</a:t>
-            </a:r>
-          </a:p>
-        </p:txBody>
-      </p:sp>
-      <p:sp>
-        <p:nvSpPr>
-          <p:cNvPr id="8" name="TextBox 7"/>
-          <p:cNvSpPr txBox="1"/>
-          <p:nvPr/>
-        </p:nvSpPr>
-        <p:spPr>
-          <a:xfrm>
-            <a:off x="1371600" y="1801368"/>
-            <a:ext cx="2509418" cy="512064"/>
-          </a:xfrm>
-          <a:prstGeom prst="rect">
-            <a:avLst/>
-          </a:prstGeom>
-          <a:noFill/>
-        </p:spPr>
-        <p:txBody>
-          <a:bodyPr wrap="square" anchor="ctr" lIns="0" rIns="0" tIns="0" bIns="0"/>
-          <a:lstStyle/>
-          <a:p>
-            <a:pPr algn="l"/>
-            <a:r>
-              <a:rPr sz="1700" b="1" i="0">
-                <a:solidFill>
-                  <a:srgbClr val="03306E"/>
-                </a:solidFill>
-                <a:latin typeface="Calibri"/>
-              </a:rPr>
-              <a:t>Customer requirements</a:t>
+              <a:t>e.g.</a:t>
             </a:r>
           </a:p>
         </p:txBody>
@@ -4821,8 +6792,8 @@
         </p:nvSpPr>
         <p:spPr>
           <a:xfrm>
-            <a:off x="777240" y="2468880"/>
-            <a:ext cx="3058058" cy="3566160"/>
+            <a:off x="8046720" y="2560320"/>
+            <a:ext cx="3291840" cy="365760"/>
           </a:xfrm>
           <a:prstGeom prst="rect">
             <a:avLst/>
@@ -4835,339 +6806,46 @@
           <a:p>
             <a:pPr algn="l"/>
             <a:r>
-              <a:rPr sz="2000" b="0" i="0">
-                <a:solidFill>
-                  <a:srgbClr val="202122"/>
-                </a:solidFill>
-                <a:latin typeface="Calibri"/>
-              </a:rPr>
-              <a:t>What the system must do on site.</a:t>
-            </a:r>
-          </a:p>
-        </p:txBody>
-      </p:sp>
-      <p:sp>
-        <p:nvSpPr>
-          <p:cNvPr id="10" name="Rounded Rectangle 9"/>
-          <p:cNvSpPr/>
-          <p:nvPr/>
-        </p:nvSpPr>
-        <p:spPr>
-          <a:xfrm>
-            <a:off x="4338218" y="1600200"/>
-            <a:ext cx="3515258" cy="4572000"/>
-          </a:xfrm>
-          <a:prstGeom prst="roundRect">
-            <a:avLst>
-              <a:gd name="adj" fmla="val 6000"/>
-            </a:avLst>
-          </a:prstGeom>
-          <a:solidFill>
-            <a:srgbClr val="EAF3FF"/>
-          </a:solidFill>
-          <a:ln>
-            <a:noFill/>
-          </a:ln>
-          <a:effectLst/>
-        </p:spPr>
-        <p:style>
-          <a:lnRef idx="1">
-            <a:schemeClr val="accent1"/>
-          </a:lnRef>
-          <a:fillRef idx="3">
-            <a:schemeClr val="accent1"/>
-          </a:fillRef>
-          <a:effectRef idx="2">
-            <a:schemeClr val="accent1"/>
-          </a:effectRef>
-          <a:fontRef idx="minor">
-            <a:schemeClr val="lt1"/>
-          </a:fontRef>
-        </p:style>
-        <p:txBody>
-          <a:bodyPr rtlCol="0" anchor="ctr"/>
-          <a:lstStyle/>
-          <a:p/>
-        </p:txBody>
-      </p:sp>
-      <p:sp>
-        <p:nvSpPr>
-          <p:cNvPr id="11" name="Oval 10"/>
-          <p:cNvSpPr/>
-          <p:nvPr/>
-        </p:nvSpPr>
-        <p:spPr>
-          <a:xfrm>
-            <a:off x="4566818" y="1828800"/>
-            <a:ext cx="457200" cy="457200"/>
-          </a:xfrm>
-          <a:prstGeom prst="ellipse">
-            <a:avLst/>
-          </a:prstGeom>
-          <a:solidFill>
-            <a:srgbClr val="E0463A"/>
-          </a:solidFill>
-          <a:ln>
-            <a:noFill/>
-          </a:ln>
-          <a:effectLst/>
-        </p:spPr>
-        <p:style>
-          <a:lnRef idx="1">
-            <a:schemeClr val="accent1"/>
-          </a:lnRef>
-          <a:fillRef idx="3">
-            <a:schemeClr val="accent1"/>
-          </a:fillRef>
-          <a:effectRef idx="2">
-            <a:schemeClr val="accent1"/>
-          </a:effectRef>
-          <a:fontRef idx="minor">
-            <a:schemeClr val="lt1"/>
-          </a:fontRef>
-        </p:style>
-        <p:txBody>
-          <a:bodyPr rtlCol="0" anchor="ctr" lIns="0" rIns="0" tIns="0" bIns="0"/>
-          <a:lstStyle/>
-          <a:p>
-            <a:pPr algn="ctr"/>
-            <a:r>
-              <a:rPr sz="1500" b="1">
+              <a:rPr sz="1300" b="1" i="0">
+                <a:solidFill>
+                  <a:srgbClr val="A9C8F0"/>
+                </a:solidFill>
+                <a:latin typeface="Calibri"/>
+              </a:rPr>
+              <a:t>EXAMPLE</a:t>
+            </a:r>
+          </a:p>
+        </p:txBody>
+      </p:sp>
+      <p:sp>
+        <p:nvSpPr>
+          <p:cNvPr id="10" name="TextBox 9"/>
+          <p:cNvSpPr txBox="1"/>
+          <p:nvPr/>
+        </p:nvSpPr>
+        <p:spPr>
+          <a:xfrm>
+            <a:off x="8046720" y="2971800"/>
+            <a:ext cx="3291840" cy="2971800"/>
+          </a:xfrm>
+          <a:prstGeom prst="rect">
+            <a:avLst/>
+          </a:prstGeom>
+          <a:noFill/>
+        </p:spPr>
+        <p:txBody>
+          <a:bodyPr wrap="square" anchor="t" lIns="0" rIns="0" tIns="0" bIns="0"/>
+          <a:lstStyle/>
+          <a:p>
+            <a:pPr algn="l"/>
+            <a:r>
+              <a:rPr sz="1900" b="0" i="0">
                 <a:solidFill>
                   <a:srgbClr val="FFFFFF"/>
                 </a:solidFill>
-                <a:latin typeface="Calibri"/>
-              </a:rPr>
-              <a:t>2</a:t>
-            </a:r>
-          </a:p>
-        </p:txBody>
-      </p:sp>
-      <p:sp>
-        <p:nvSpPr>
-          <p:cNvPr id="12" name="TextBox 11"/>
-          <p:cNvSpPr txBox="1"/>
-          <p:nvPr/>
-        </p:nvSpPr>
-        <p:spPr>
-          <a:xfrm>
-            <a:off x="5161178" y="1801368"/>
-            <a:ext cx="2509418" cy="512064"/>
-          </a:xfrm>
-          <a:prstGeom prst="rect">
-            <a:avLst/>
-          </a:prstGeom>
-          <a:noFill/>
-        </p:spPr>
-        <p:txBody>
-          <a:bodyPr wrap="square" anchor="ctr" lIns="0" rIns="0" tIns="0" bIns="0"/>
-          <a:lstStyle/>
-          <a:p>
-            <a:pPr algn="l"/>
-            <a:r>
-              <a:rPr sz="1600" b="1" i="0">
-                <a:solidFill>
-                  <a:srgbClr val="03306E"/>
-                </a:solidFill>
-                <a:latin typeface="Calibri"/>
-              </a:rPr>
-              <a:t>Regulatory requirements</a:t>
-            </a:r>
-          </a:p>
-        </p:txBody>
-      </p:sp>
-      <p:sp>
-        <p:nvSpPr>
-          <p:cNvPr id="13" name="TextBox 12"/>
-          <p:cNvSpPr txBox="1"/>
-          <p:nvPr/>
-        </p:nvSpPr>
-        <p:spPr>
-          <a:xfrm>
-            <a:off x="4566818" y="2468880"/>
-            <a:ext cx="3058058" cy="3566160"/>
-          </a:xfrm>
-          <a:prstGeom prst="rect">
-            <a:avLst/>
-          </a:prstGeom>
-          <a:noFill/>
-        </p:spPr>
-        <p:txBody>
-          <a:bodyPr wrap="square" anchor="t" lIns="0" rIns="0" tIns="0" bIns="0"/>
-          <a:lstStyle/>
-          <a:p>
-            <a:pPr algn="l"/>
-            <a:r>
-              <a:rPr sz="2000" b="0" i="0">
-                <a:solidFill>
-                  <a:srgbClr val="202122"/>
-                </a:solidFill>
-                <a:latin typeface="Calibri"/>
-              </a:rPr>
-              <a:t>Safety law and standards.</a:t>
-            </a:r>
-          </a:p>
-        </p:txBody>
-      </p:sp>
-      <p:sp>
-        <p:nvSpPr>
-          <p:cNvPr id="14" name="Rounded Rectangle 13"/>
-          <p:cNvSpPr/>
-          <p:nvPr/>
-        </p:nvSpPr>
-        <p:spPr>
-          <a:xfrm>
-            <a:off x="8127796" y="1600200"/>
-            <a:ext cx="3515258" cy="4572000"/>
-          </a:xfrm>
-          <a:prstGeom prst="roundRect">
-            <a:avLst>
-              <a:gd name="adj" fmla="val 6000"/>
-            </a:avLst>
-          </a:prstGeom>
-          <a:solidFill>
-            <a:srgbClr val="EAF3FF"/>
-          </a:solidFill>
-          <a:ln>
-            <a:noFill/>
-          </a:ln>
-          <a:effectLst/>
-        </p:spPr>
-        <p:style>
-          <a:lnRef idx="1">
-            <a:schemeClr val="accent1"/>
-          </a:lnRef>
-          <a:fillRef idx="3">
-            <a:schemeClr val="accent1"/>
-          </a:fillRef>
-          <a:effectRef idx="2">
-            <a:schemeClr val="accent1"/>
-          </a:effectRef>
-          <a:fontRef idx="minor">
-            <a:schemeClr val="lt1"/>
-          </a:fontRef>
-        </p:style>
-        <p:txBody>
-          <a:bodyPr rtlCol="0" anchor="ctr"/>
-          <a:lstStyle/>
-          <a:p/>
-        </p:txBody>
-      </p:sp>
-      <p:sp>
-        <p:nvSpPr>
-          <p:cNvPr id="15" name="Oval 14"/>
-          <p:cNvSpPr/>
-          <p:nvPr/>
-        </p:nvSpPr>
-        <p:spPr>
-          <a:xfrm>
-            <a:off x="8356396" y="1828800"/>
-            <a:ext cx="457200" cy="457200"/>
-          </a:xfrm>
-          <a:prstGeom prst="ellipse">
-            <a:avLst/>
-          </a:prstGeom>
-          <a:solidFill>
-            <a:srgbClr val="E0463A"/>
-          </a:solidFill>
-          <a:ln>
-            <a:noFill/>
-          </a:ln>
-          <a:effectLst/>
-        </p:spPr>
-        <p:style>
-          <a:lnRef idx="1">
-            <a:schemeClr val="accent1"/>
-          </a:lnRef>
-          <a:fillRef idx="3">
-            <a:schemeClr val="accent1"/>
-          </a:fillRef>
-          <a:effectRef idx="2">
-            <a:schemeClr val="accent1"/>
-          </a:effectRef>
-          <a:fontRef idx="minor">
-            <a:schemeClr val="lt1"/>
-          </a:fontRef>
-        </p:style>
-        <p:txBody>
-          <a:bodyPr rtlCol="0" anchor="ctr" lIns="0" rIns="0" tIns="0" bIns="0"/>
-          <a:lstStyle/>
-          <a:p>
-            <a:pPr algn="ctr"/>
-            <a:r>
-              <a:rPr sz="1500" b="1">
-                <a:solidFill>
-                  <a:srgbClr val="FFFFFF"/>
-                </a:solidFill>
-                <a:latin typeface="Calibri"/>
-              </a:rPr>
-              <a:t>3</a:t>
-            </a:r>
-          </a:p>
-        </p:txBody>
-      </p:sp>
-      <p:sp>
-        <p:nvSpPr>
-          <p:cNvPr id="16" name="TextBox 15"/>
-          <p:cNvSpPr txBox="1"/>
-          <p:nvPr/>
-        </p:nvSpPr>
-        <p:spPr>
-          <a:xfrm>
-            <a:off x="8950756" y="1801368"/>
-            <a:ext cx="2509418" cy="512064"/>
-          </a:xfrm>
-          <a:prstGeom prst="rect">
-            <a:avLst/>
-          </a:prstGeom>
-          <a:noFill/>
-        </p:spPr>
-        <p:txBody>
-          <a:bodyPr wrap="square" anchor="ctr" lIns="0" rIns="0" tIns="0" bIns="0"/>
-          <a:lstStyle/>
-          <a:p>
-            <a:pPr algn="l"/>
-            <a:r>
-              <a:rPr sz="1600" b="1" i="0">
-                <a:solidFill>
-                  <a:srgbClr val="03306E"/>
-                </a:solidFill>
-                <a:latin typeface="Calibri"/>
-              </a:rPr>
-              <a:t>Manufacturer specifications</a:t>
-            </a:r>
-          </a:p>
-        </p:txBody>
-      </p:sp>
-      <p:sp>
-        <p:nvSpPr>
-          <p:cNvPr id="17" name="TextBox 16"/>
-          <p:cNvSpPr txBox="1"/>
-          <p:nvPr/>
-        </p:nvSpPr>
-        <p:spPr>
-          <a:xfrm>
-            <a:off x="8356396" y="2468880"/>
-            <a:ext cx="3058058" cy="3566160"/>
-          </a:xfrm>
-          <a:prstGeom prst="rect">
-            <a:avLst/>
-          </a:prstGeom>
-          <a:noFill/>
-        </p:spPr>
-        <p:txBody>
-          <a:bodyPr wrap="square" anchor="t" lIns="0" rIns="0" tIns="0" bIns="0"/>
-          <a:lstStyle/>
-          <a:p>
-            <a:pPr algn="l"/>
-            <a:r>
-              <a:rPr sz="2000" b="0" i="0">
-                <a:solidFill>
-                  <a:srgbClr val="202122"/>
-                </a:solidFill>
-                <a:latin typeface="Calibri"/>
-              </a:rPr>
-              <a:t>Mounting, alignment, torque settings, clearances.</a:t>
+                <a:latin typeface="Cambria"/>
+              </a:rPr>
+              <a:t>A pump installed with its shaft misaligned by half a millimetre will wear out its bearings and seals far faster than the manufacturer's rated life.</a:t>
             </a:r>
           </a:p>
         </p:txBody>
@@ -5259,7 +6937,7 @@
                 </a:solidFill>
                 <a:latin typeface="Cambria"/>
               </a:rPr>
-              <a:t>Integrating systems</a:t>
+              <a:t>Installation requirements</a:t>
             </a:r>
           </a:p>
         </p:txBody>
@@ -5332,20 +7010,22 @@
       </p:sp>
       <p:sp>
         <p:nvSpPr>
-          <p:cNvPr id="6" name="Rectangle 5"/>
+          <p:cNvPr id="6" name="Rounded Rectangle 5"/>
           <p:cNvSpPr/>
           <p:nvPr/>
         </p:nvSpPr>
         <p:spPr>
           <a:xfrm>
-            <a:off x="1603217" y="2793492"/>
-            <a:ext cx="8985260" cy="36576"/>
-          </a:xfrm>
-          <a:prstGeom prst="rect">
-            <a:avLst/>
+            <a:off x="548640" y="1600200"/>
+            <a:ext cx="3515258" cy="4572000"/>
+          </a:xfrm>
+          <a:prstGeom prst="roundRect">
+            <a:avLst>
+              <a:gd name="adj" fmla="val 6000"/>
+            </a:avLst>
           </a:prstGeom>
           <a:solidFill>
-            <a:srgbClr val="A9C8F0"/>
+            <a:srgbClr val="EAF3FF"/>
           </a:solidFill>
           <a:ln>
             <a:noFill/>
@@ -5380,8 +7060,8 @@
         </p:nvSpPr>
         <p:spPr>
           <a:xfrm>
-            <a:off x="1283177" y="2491740"/>
-            <a:ext cx="640080" cy="640080"/>
+            <a:off x="777240" y="1828800"/>
+            <a:ext cx="457200" cy="457200"/>
           </a:xfrm>
           <a:prstGeom prst="ellipse">
             <a:avLst/>
@@ -5414,7 +7094,7 @@
           <a:p>
             <a:pPr algn="ctr"/>
             <a:r>
-              <a:rPr sz="2000" b="1">
+              <a:rPr sz="1500" b="1">
                 <a:solidFill>
                   <a:srgbClr val="FFFFFF"/>
                 </a:solidFill>
@@ -5433,8 +7113,8 @@
         </p:nvSpPr>
         <p:spPr>
           <a:xfrm>
-            <a:off x="548640" y="3268979"/>
-            <a:ext cx="2109155" cy="731520"/>
+            <a:off x="1371600" y="1801368"/>
+            <a:ext cx="2509418" cy="512064"/>
           </a:xfrm>
           <a:prstGeom prst="rect">
             <a:avLst/>
@@ -5442,32 +7122,65 @@
           <a:noFill/>
         </p:spPr>
         <p:txBody>
+          <a:bodyPr wrap="square" anchor="ctr" lIns="0" rIns="0" tIns="0" bIns="0"/>
+          <a:lstStyle/>
+          <a:p>
+            <a:pPr algn="l"/>
+            <a:r>
+              <a:rPr sz="1700" b="1" i="0">
+                <a:solidFill>
+                  <a:srgbClr val="03306E"/>
+                </a:solidFill>
+                <a:latin typeface="Calibri"/>
+              </a:rPr>
+              <a:t>Customer requirements</a:t>
+            </a:r>
+          </a:p>
+        </p:txBody>
+      </p:sp>
+      <p:sp>
+        <p:nvSpPr>
+          <p:cNvPr id="9" name="TextBox 8"/>
+          <p:cNvSpPr txBox="1"/>
+          <p:nvPr/>
+        </p:nvSpPr>
+        <p:spPr>
+          <a:xfrm>
+            <a:off x="777240" y="2468880"/>
+            <a:ext cx="3058058" cy="3566160"/>
+          </a:xfrm>
+          <a:prstGeom prst="rect">
+            <a:avLst/>
+          </a:prstGeom>
+          <a:noFill/>
+        </p:spPr>
+        <p:txBody>
           <a:bodyPr wrap="square" anchor="t" lIns="0" rIns="0" tIns="0" bIns="0"/>
           <a:lstStyle/>
           <a:p>
-            <a:pPr algn="ctr"/>
-            <a:r>
-              <a:rPr sz="1700" b="1" i="0">
-                <a:solidFill>
-                  <a:srgbClr val="03306E"/>
-                </a:solidFill>
-                <a:latin typeface="Calibri"/>
-              </a:rPr>
-              <a:t>Plan</a:t>
-            </a:r>
-          </a:p>
-        </p:txBody>
-      </p:sp>
-      <p:sp>
-        <p:nvSpPr>
-          <p:cNvPr id="9" name="Rounded Rectangle 8"/>
+            <a:pPr algn="l"/>
+            <a:r>
+              <a:rPr sz="2000" b="0" i="0">
+                <a:solidFill>
+                  <a:srgbClr val="202122"/>
+                </a:solidFill>
+                <a:latin typeface="Calibri"/>
+              </a:rPr>
+              <a:t>What the system must do on site.</a:t>
+            </a:r>
+          </a:p>
+        </p:txBody>
+      </p:sp>
+      <p:sp>
+        <p:nvSpPr>
+          <p:cNvPr id="10" name="Rounded Rectangle 9"/>
           <p:cNvSpPr/>
           <p:nvPr/>
         </p:nvSpPr>
         <p:spPr>
           <a:xfrm>
-            <a:off x="548640" y="4046220"/>
-            <a:ext cx="2109155" cy="1234439"/>
+            <a:off x="4338218" y="1600200"/>
+            <a:ext cx="3515258" cy="4572000"/>
           </a:xfrm>
           <a:prstGeom prst="roundRect">
             <a:avLst>
@@ -5504,47 +7217,14 @@
       </p:sp>
       <p:sp>
         <p:nvSpPr>
-          <p:cNvPr id="10" name="TextBox 9"/>
-          <p:cNvSpPr txBox="1"/>
-          <p:nvPr/>
-        </p:nvSpPr>
-        <p:spPr>
-          <a:xfrm>
-            <a:off x="685800" y="4183380"/>
-            <a:ext cx="1834835" cy="960119"/>
-          </a:xfrm>
-          <a:prstGeom prst="rect">
-            <a:avLst/>
-          </a:prstGeom>
-          <a:noFill/>
-        </p:spPr>
-        <p:txBody>
-          <a:bodyPr wrap="square" anchor="t" lIns="0" rIns="0" tIns="0" bIns="0"/>
-          <a:lstStyle/>
-          <a:p>
-            <a:pPr algn="l"/>
-            <a:r>
-              <a:rPr sz="1800" b="0" i="0">
-                <a:solidFill>
-                  <a:srgbClr val="202122"/>
-                </a:solidFill>
-                <a:latin typeface="Calibri"/>
-              </a:rPr>
-              <a:t>Define interfaces and sequence.</a:t>
-            </a:r>
-          </a:p>
-        </p:txBody>
-      </p:sp>
-      <p:sp>
-        <p:nvSpPr>
           <p:cNvPr id="11" name="Oval 10"/>
           <p:cNvSpPr/>
           <p:nvPr/>
         </p:nvSpPr>
         <p:spPr>
           <a:xfrm>
-            <a:off x="3529492" y="2491740"/>
-            <a:ext cx="640080" cy="640080"/>
+            <a:off x="4566818" y="1828800"/>
+            <a:ext cx="457200" cy="457200"/>
           </a:xfrm>
           <a:prstGeom prst="ellipse">
             <a:avLst/>
@@ -5577,7 +7257,7 @@
           <a:p>
             <a:pPr algn="ctr"/>
             <a:r>
-              <a:rPr sz="2000" b="1">
+              <a:rPr sz="1500" b="1">
                 <a:solidFill>
                   <a:srgbClr val="FFFFFF"/>
                 </a:solidFill>
@@ -5596,8 +7276,8 @@
         </p:nvSpPr>
         <p:spPr>
           <a:xfrm>
-            <a:off x="2794955" y="3268979"/>
-            <a:ext cx="2109155" cy="731520"/>
+            <a:off x="5161178" y="1801368"/>
+            <a:ext cx="2509418" cy="512064"/>
           </a:xfrm>
           <a:prstGeom prst="rect">
             <a:avLst/>
@@ -5605,32 +7285,65 @@
           <a:noFill/>
         </p:spPr>
         <p:txBody>
+          <a:bodyPr wrap="square" anchor="ctr" lIns="0" rIns="0" tIns="0" bIns="0"/>
+          <a:lstStyle/>
+          <a:p>
+            <a:pPr algn="l"/>
+            <a:r>
+              <a:rPr sz="1600" b="1" i="0">
+                <a:solidFill>
+                  <a:srgbClr val="03306E"/>
+                </a:solidFill>
+                <a:latin typeface="Calibri"/>
+              </a:rPr>
+              <a:t>Regulatory requirements</a:t>
+            </a:r>
+          </a:p>
+        </p:txBody>
+      </p:sp>
+      <p:sp>
+        <p:nvSpPr>
+          <p:cNvPr id="13" name="TextBox 12"/>
+          <p:cNvSpPr txBox="1"/>
+          <p:nvPr/>
+        </p:nvSpPr>
+        <p:spPr>
+          <a:xfrm>
+            <a:off x="4566818" y="2468880"/>
+            <a:ext cx="3058058" cy="3566160"/>
+          </a:xfrm>
+          <a:prstGeom prst="rect">
+            <a:avLst/>
+          </a:prstGeom>
+          <a:noFill/>
+        </p:spPr>
+        <p:txBody>
           <a:bodyPr wrap="square" anchor="t" lIns="0" rIns="0" tIns="0" bIns="0"/>
           <a:lstStyle/>
           <a:p>
-            <a:pPr algn="ctr"/>
-            <a:r>
-              <a:rPr sz="1700" b="1" i="0">
-                <a:solidFill>
-                  <a:srgbClr val="03306E"/>
-                </a:solidFill>
-                <a:latin typeface="Calibri"/>
-              </a:rPr>
-              <a:t>Combine</a:t>
-            </a:r>
-          </a:p>
-        </p:txBody>
-      </p:sp>
-      <p:sp>
-        <p:nvSpPr>
-          <p:cNvPr id="13" name="Rounded Rectangle 12"/>
+            <a:pPr algn="l"/>
+            <a:r>
+              <a:rPr sz="2000" b="0" i="0">
+                <a:solidFill>
+                  <a:srgbClr val="202122"/>
+                </a:solidFill>
+                <a:latin typeface="Calibri"/>
+              </a:rPr>
+              <a:t>Safety law and standards.</a:t>
+            </a:r>
+          </a:p>
+        </p:txBody>
+      </p:sp>
+      <p:sp>
+        <p:nvSpPr>
+          <p:cNvPr id="14" name="Rounded Rectangle 13"/>
           <p:cNvSpPr/>
           <p:nvPr/>
         </p:nvSpPr>
         <p:spPr>
           <a:xfrm>
-            <a:off x="2794955" y="4046220"/>
-            <a:ext cx="2109155" cy="1234439"/>
+            <a:off x="8127796" y="1600200"/>
+            <a:ext cx="3515258" cy="4572000"/>
           </a:xfrm>
           <a:prstGeom prst="roundRect">
             <a:avLst>
@@ -5667,47 +7380,14 @@
       </p:sp>
       <p:sp>
         <p:nvSpPr>
-          <p:cNvPr id="14" name="TextBox 13"/>
-          <p:cNvSpPr txBox="1"/>
-          <p:nvPr/>
-        </p:nvSpPr>
-        <p:spPr>
-          <a:xfrm>
-            <a:off x="2932115" y="4183380"/>
-            <a:ext cx="1834835" cy="960119"/>
-          </a:xfrm>
-          <a:prstGeom prst="rect">
-            <a:avLst/>
-          </a:prstGeom>
-          <a:noFill/>
-        </p:spPr>
-        <p:txBody>
-          <a:bodyPr wrap="square" anchor="t" lIns="0" rIns="0" tIns="0" bIns="0"/>
-          <a:lstStyle/>
-          <a:p>
-            <a:pPr algn="l"/>
-            <a:r>
-              <a:rPr sz="1800" b="0" i="0">
-                <a:solidFill>
-                  <a:srgbClr val="202122"/>
-                </a:solidFill>
-                <a:latin typeface="Calibri"/>
-              </a:rPr>
-              <a:t>Bring sub-systems together.</a:t>
-            </a:r>
-          </a:p>
-        </p:txBody>
-      </p:sp>
-      <p:sp>
-        <p:nvSpPr>
           <p:cNvPr id="15" name="Oval 14"/>
           <p:cNvSpPr/>
           <p:nvPr/>
         </p:nvSpPr>
         <p:spPr>
           <a:xfrm>
-            <a:off x="5775807" y="2491740"/>
-            <a:ext cx="640080" cy="640080"/>
+            <a:off x="8356396" y="1828800"/>
+            <a:ext cx="457200" cy="457200"/>
           </a:xfrm>
           <a:prstGeom prst="ellipse">
             <a:avLst/>
@@ -5740,7 +7420,7 @@
           <a:p>
             <a:pPr algn="ctr"/>
             <a:r>
-              <a:rPr sz="2000" b="1">
+              <a:rPr sz="1500" b="1">
                 <a:solidFill>
                   <a:srgbClr val="FFFFFF"/>
                 </a:solidFill>
@@ -5759,8 +7439,8 @@
         </p:nvSpPr>
         <p:spPr>
           <a:xfrm>
-            <a:off x="5041270" y="3268979"/>
-            <a:ext cx="2109155" cy="731520"/>
+            <a:off x="8950756" y="1801368"/>
+            <a:ext cx="2509418" cy="512064"/>
           </a:xfrm>
           <a:prstGeom prst="rect">
             <a:avLst/>
@@ -5768,421 +7448,51 @@
           <a:noFill/>
         </p:spPr>
         <p:txBody>
+          <a:bodyPr wrap="square" anchor="ctr" lIns="0" rIns="0" tIns="0" bIns="0"/>
+          <a:lstStyle/>
+          <a:p>
+            <a:pPr algn="l"/>
+            <a:r>
+              <a:rPr sz="1600" b="1" i="0">
+                <a:solidFill>
+                  <a:srgbClr val="03306E"/>
+                </a:solidFill>
+                <a:latin typeface="Calibri"/>
+              </a:rPr>
+              <a:t>Manufacturer specifications</a:t>
+            </a:r>
+          </a:p>
+        </p:txBody>
+      </p:sp>
+      <p:sp>
+        <p:nvSpPr>
+          <p:cNvPr id="17" name="TextBox 16"/>
+          <p:cNvSpPr txBox="1"/>
+          <p:nvPr/>
+        </p:nvSpPr>
+        <p:spPr>
+          <a:xfrm>
+            <a:off x="8356396" y="2468880"/>
+            <a:ext cx="3058058" cy="3566160"/>
+          </a:xfrm>
+          <a:prstGeom prst="rect">
+            <a:avLst/>
+          </a:prstGeom>
+          <a:noFill/>
+        </p:spPr>
+        <p:txBody>
           <a:bodyPr wrap="square" anchor="t" lIns="0" rIns="0" tIns="0" bIns="0"/>
           <a:lstStyle/>
           <a:p>
-            <a:pPr algn="ctr"/>
-            <a:r>
-              <a:rPr sz="1700" b="1" i="0">
-                <a:solidFill>
-                  <a:srgbClr val="03306E"/>
-                </a:solidFill>
-                <a:latin typeface="Calibri"/>
-              </a:rPr>
-              <a:t>Connect functions</a:t>
-            </a:r>
-          </a:p>
-        </p:txBody>
-      </p:sp>
-      <p:sp>
-        <p:nvSpPr>
-          <p:cNvPr id="17" name="Rounded Rectangle 16"/>
-          <p:cNvSpPr/>
-          <p:nvPr/>
-        </p:nvSpPr>
-        <p:spPr>
-          <a:xfrm>
-            <a:off x="5041270" y="4046220"/>
-            <a:ext cx="2109155" cy="1234439"/>
-          </a:xfrm>
-          <a:prstGeom prst="roundRect">
-            <a:avLst>
-              <a:gd name="adj" fmla="val 6000"/>
-            </a:avLst>
-          </a:prstGeom>
-          <a:solidFill>
-            <a:srgbClr val="EAF3FF"/>
-          </a:solidFill>
-          <a:ln>
-            <a:noFill/>
-          </a:ln>
-          <a:effectLst/>
-        </p:spPr>
-        <p:style>
-          <a:lnRef idx="1">
-            <a:schemeClr val="accent1"/>
-          </a:lnRef>
-          <a:fillRef idx="3">
-            <a:schemeClr val="accent1"/>
-          </a:fillRef>
-          <a:effectRef idx="2">
-            <a:schemeClr val="accent1"/>
-          </a:effectRef>
-          <a:fontRef idx="minor">
-            <a:schemeClr val="lt1"/>
-          </a:fontRef>
-        </p:style>
-        <p:txBody>
-          <a:bodyPr rtlCol="0" anchor="ctr"/>
-          <a:lstStyle/>
-          <a:p/>
-        </p:txBody>
-      </p:sp>
-      <p:sp>
-        <p:nvSpPr>
-          <p:cNvPr id="18" name="TextBox 17"/>
-          <p:cNvSpPr txBox="1"/>
-          <p:nvPr/>
-        </p:nvSpPr>
-        <p:spPr>
-          <a:xfrm>
-            <a:off x="5178430" y="4183380"/>
-            <a:ext cx="1834835" cy="960119"/>
-          </a:xfrm>
-          <a:prstGeom prst="rect">
-            <a:avLst/>
-          </a:prstGeom>
-          <a:noFill/>
-        </p:spPr>
-        <p:txBody>
-          <a:bodyPr wrap="square" anchor="t" lIns="0" rIns="0" tIns="0" bIns="0"/>
-          <a:lstStyle/>
-          <a:p>
             <a:pPr algn="l"/>
             <a:r>
-              <a:rPr sz="1800" b="0" i="0">
+              <a:rPr sz="2000" b="0" i="0">
                 <a:solidFill>
                   <a:srgbClr val="202122"/>
                 </a:solidFill>
                 <a:latin typeface="Calibri"/>
               </a:rPr>
-              <a:t>Mechanical, electrical and control links.</a:t>
-            </a:r>
-          </a:p>
-        </p:txBody>
-      </p:sp>
-      <p:sp>
-        <p:nvSpPr>
-          <p:cNvPr id="19" name="Oval 18"/>
-          <p:cNvSpPr/>
-          <p:nvPr/>
-        </p:nvSpPr>
-        <p:spPr>
-          <a:xfrm>
-            <a:off x="8022122" y="2491740"/>
-            <a:ext cx="640080" cy="640080"/>
-          </a:xfrm>
-          <a:prstGeom prst="ellipse">
-            <a:avLst/>
-          </a:prstGeom>
-          <a:solidFill>
-            <a:srgbClr val="E0463A"/>
-          </a:solidFill>
-          <a:ln>
-            <a:noFill/>
-          </a:ln>
-          <a:effectLst/>
-        </p:spPr>
-        <p:style>
-          <a:lnRef idx="1">
-            <a:schemeClr val="accent1"/>
-          </a:lnRef>
-          <a:fillRef idx="3">
-            <a:schemeClr val="accent1"/>
-          </a:fillRef>
-          <a:effectRef idx="2">
-            <a:schemeClr val="accent1"/>
-          </a:effectRef>
-          <a:fontRef idx="minor">
-            <a:schemeClr val="lt1"/>
-          </a:fontRef>
-        </p:style>
-        <p:txBody>
-          <a:bodyPr rtlCol="0" anchor="ctr" lIns="0" rIns="0" tIns="0" bIns="0"/>
-          <a:lstStyle/>
-          <a:p>
-            <a:pPr algn="ctr"/>
-            <a:r>
-              <a:rPr sz="2000" b="1">
-                <a:solidFill>
-                  <a:srgbClr val="FFFFFF"/>
-                </a:solidFill>
-                <a:latin typeface="Calibri"/>
-              </a:rPr>
-              <a:t>4</a:t>
-            </a:r>
-          </a:p>
-        </p:txBody>
-      </p:sp>
-      <p:sp>
-        <p:nvSpPr>
-          <p:cNvPr id="20" name="TextBox 19"/>
-          <p:cNvSpPr txBox="1"/>
-          <p:nvPr/>
-        </p:nvSpPr>
-        <p:spPr>
-          <a:xfrm>
-            <a:off x="7287585" y="3268979"/>
-            <a:ext cx="2109155" cy="731520"/>
-          </a:xfrm>
-          <a:prstGeom prst="rect">
-            <a:avLst/>
-          </a:prstGeom>
-          <a:noFill/>
-        </p:spPr>
-        <p:txBody>
-          <a:bodyPr wrap="square" anchor="t" lIns="0" rIns="0" tIns="0" bIns="0"/>
-          <a:lstStyle/>
-          <a:p>
-            <a:pPr algn="ctr"/>
-            <a:r>
-              <a:rPr sz="1700" b="1" i="0">
-                <a:solidFill>
-                  <a:srgbClr val="03306E"/>
-                </a:solidFill>
-                <a:latin typeface="Calibri"/>
-              </a:rPr>
-              <a:t>Test</a:t>
-            </a:r>
-          </a:p>
-        </p:txBody>
-      </p:sp>
-      <p:sp>
-        <p:nvSpPr>
-          <p:cNvPr id="21" name="Rounded Rectangle 20"/>
-          <p:cNvSpPr/>
-          <p:nvPr/>
-        </p:nvSpPr>
-        <p:spPr>
-          <a:xfrm>
-            <a:off x="7287585" y="4046220"/>
-            <a:ext cx="2109155" cy="1234439"/>
-          </a:xfrm>
-          <a:prstGeom prst="roundRect">
-            <a:avLst>
-              <a:gd name="adj" fmla="val 6000"/>
-            </a:avLst>
-          </a:prstGeom>
-          <a:solidFill>
-            <a:srgbClr val="EAF3FF"/>
-          </a:solidFill>
-          <a:ln>
-            <a:noFill/>
-          </a:ln>
-          <a:effectLst/>
-        </p:spPr>
-        <p:style>
-          <a:lnRef idx="1">
-            <a:schemeClr val="accent1"/>
-          </a:lnRef>
-          <a:fillRef idx="3">
-            <a:schemeClr val="accent1"/>
-          </a:fillRef>
-          <a:effectRef idx="2">
-            <a:schemeClr val="accent1"/>
-          </a:effectRef>
-          <a:fontRef idx="minor">
-            <a:schemeClr val="lt1"/>
-          </a:fontRef>
-        </p:style>
-        <p:txBody>
-          <a:bodyPr rtlCol="0" anchor="ctr"/>
-          <a:lstStyle/>
-          <a:p/>
-        </p:txBody>
-      </p:sp>
-      <p:sp>
-        <p:nvSpPr>
-          <p:cNvPr id="22" name="TextBox 21"/>
-          <p:cNvSpPr txBox="1"/>
-          <p:nvPr/>
-        </p:nvSpPr>
-        <p:spPr>
-          <a:xfrm>
-            <a:off x="7424745" y="4183380"/>
-            <a:ext cx="1834835" cy="960119"/>
-          </a:xfrm>
-          <a:prstGeom prst="rect">
-            <a:avLst/>
-          </a:prstGeom>
-          <a:noFill/>
-        </p:spPr>
-        <p:txBody>
-          <a:bodyPr wrap="square" anchor="t" lIns="0" rIns="0" tIns="0" bIns="0"/>
-          <a:lstStyle/>
-          <a:p>
-            <a:pPr algn="l"/>
-            <a:r>
-              <a:rPr sz="1800" b="0" i="0">
-                <a:solidFill>
-                  <a:srgbClr val="202122"/>
-                </a:solidFill>
-                <a:latin typeface="Calibri"/>
-              </a:rPr>
-              <a:t>Check each interface, then the whole.</a:t>
-            </a:r>
-          </a:p>
-        </p:txBody>
-      </p:sp>
-      <p:sp>
-        <p:nvSpPr>
-          <p:cNvPr id="23" name="Oval 22"/>
-          <p:cNvSpPr/>
-          <p:nvPr/>
-        </p:nvSpPr>
-        <p:spPr>
-          <a:xfrm>
-            <a:off x="10268437" y="2491740"/>
-            <a:ext cx="640080" cy="640080"/>
-          </a:xfrm>
-          <a:prstGeom prst="ellipse">
-            <a:avLst/>
-          </a:prstGeom>
-          <a:solidFill>
-            <a:srgbClr val="E0463A"/>
-          </a:solidFill>
-          <a:ln>
-            <a:noFill/>
-          </a:ln>
-          <a:effectLst/>
-        </p:spPr>
-        <p:style>
-          <a:lnRef idx="1">
-            <a:schemeClr val="accent1"/>
-          </a:lnRef>
-          <a:fillRef idx="3">
-            <a:schemeClr val="accent1"/>
-          </a:fillRef>
-          <a:effectRef idx="2">
-            <a:schemeClr val="accent1"/>
-          </a:effectRef>
-          <a:fontRef idx="minor">
-            <a:schemeClr val="lt1"/>
-          </a:fontRef>
-        </p:style>
-        <p:txBody>
-          <a:bodyPr rtlCol="0" anchor="ctr" lIns="0" rIns="0" tIns="0" bIns="0"/>
-          <a:lstStyle/>
-          <a:p>
-            <a:pPr algn="ctr"/>
-            <a:r>
-              <a:rPr sz="2000" b="1">
-                <a:solidFill>
-                  <a:srgbClr val="FFFFFF"/>
-                </a:solidFill>
-                <a:latin typeface="Calibri"/>
-              </a:rPr>
-              <a:t>5</a:t>
-            </a:r>
-          </a:p>
-        </p:txBody>
-      </p:sp>
-      <p:sp>
-        <p:nvSpPr>
-          <p:cNvPr id="24" name="TextBox 23"/>
-          <p:cNvSpPr txBox="1"/>
-          <p:nvPr/>
-        </p:nvSpPr>
-        <p:spPr>
-          <a:xfrm>
-            <a:off x="9533900" y="3268979"/>
-            <a:ext cx="2109155" cy="731520"/>
-          </a:xfrm>
-          <a:prstGeom prst="rect">
-            <a:avLst/>
-          </a:prstGeom>
-          <a:noFill/>
-        </p:spPr>
-        <p:txBody>
-          <a:bodyPr wrap="square" anchor="t" lIns="0" rIns="0" tIns="0" bIns="0"/>
-          <a:lstStyle/>
-          <a:p>
-            <a:pPr algn="ctr"/>
-            <a:r>
-              <a:rPr sz="1700" b="1" i="0">
-                <a:solidFill>
-                  <a:srgbClr val="03306E"/>
-                </a:solidFill>
-                <a:latin typeface="Calibri"/>
-              </a:rPr>
-              <a:t>Commission</a:t>
-            </a:r>
-          </a:p>
-        </p:txBody>
-      </p:sp>
-      <p:sp>
-        <p:nvSpPr>
-          <p:cNvPr id="25" name="Rounded Rectangle 24"/>
-          <p:cNvSpPr/>
-          <p:nvPr/>
-        </p:nvSpPr>
-        <p:spPr>
-          <a:xfrm>
-            <a:off x="9533900" y="4046220"/>
-            <a:ext cx="2109155" cy="1234439"/>
-          </a:xfrm>
-          <a:prstGeom prst="roundRect">
-            <a:avLst>
-              <a:gd name="adj" fmla="val 6000"/>
-            </a:avLst>
-          </a:prstGeom>
-          <a:solidFill>
-            <a:srgbClr val="EAF3FF"/>
-          </a:solidFill>
-          <a:ln>
-            <a:noFill/>
-          </a:ln>
-          <a:effectLst/>
-        </p:spPr>
-        <p:style>
-          <a:lnRef idx="1">
-            <a:schemeClr val="accent1"/>
-          </a:lnRef>
-          <a:fillRef idx="3">
-            <a:schemeClr val="accent1"/>
-          </a:fillRef>
-          <a:effectRef idx="2">
-            <a:schemeClr val="accent1"/>
-          </a:effectRef>
-          <a:fontRef idx="minor">
-            <a:schemeClr val="lt1"/>
-          </a:fontRef>
-        </p:style>
-        <p:txBody>
-          <a:bodyPr rtlCol="0" anchor="ctr"/>
-          <a:lstStyle/>
-          <a:p/>
-        </p:txBody>
-      </p:sp>
-      <p:sp>
-        <p:nvSpPr>
-          <p:cNvPr id="26" name="TextBox 25"/>
-          <p:cNvSpPr txBox="1"/>
-          <p:nvPr/>
-        </p:nvSpPr>
-        <p:spPr>
-          <a:xfrm>
-            <a:off x="9671060" y="4183380"/>
-            <a:ext cx="1834835" cy="960119"/>
-          </a:xfrm>
-          <a:prstGeom prst="rect">
-            <a:avLst/>
-          </a:prstGeom>
-          <a:noFill/>
-        </p:spPr>
-        <p:txBody>
-          <a:bodyPr wrap="square" anchor="t" lIns="0" rIns="0" tIns="0" bIns="0"/>
-          <a:lstStyle/>
-          <a:p>
-            <a:pPr algn="l"/>
-            <a:r>
-              <a:rPr sz="1800" b="0" i="0">
-                <a:solidFill>
-                  <a:srgbClr val="202122"/>
-                </a:solidFill>
-                <a:latin typeface="Calibri"/>
-              </a:rPr>
-              <a:t>Prove it works as specified.</a:t>
+              <a:t>Mounting, alignment, torque settings, clearances.</a:t>
             </a:r>
           </a:p>
         </p:txBody>
@@ -6274,7 +7584,7 @@
                 </a:solidFill>
                 <a:latin typeface="Cambria"/>
               </a:rPr>
-              <a:t>Check your understanding</a:t>
+              <a:t>Quick check: Installation requirements</a:t>
             </a:r>
           </a:p>
         </p:txBody>
@@ -6353,8 +7663,8 @@
         </p:nvSpPr>
         <p:spPr>
           <a:xfrm>
-            <a:off x="548640" y="1618488"/>
-            <a:ext cx="411480" cy="411480"/>
+            <a:off x="548640" y="1691640"/>
+            <a:ext cx="502920" cy="502920"/>
           </a:xfrm>
           <a:prstGeom prst="ellipse">
             <a:avLst/>
@@ -6387,7 +7697,7 @@
           <a:p>
             <a:pPr algn="ctr"/>
             <a:r>
-              <a:rPr sz="1400" b="1">
+              <a:rPr sz="1600" b="1">
                 <a:solidFill>
                   <a:srgbClr val="FFFFFF"/>
                 </a:solidFill>
@@ -6406,8 +7716,8 @@
         </p:nvSpPr>
         <p:spPr>
           <a:xfrm>
-            <a:off x="1234440" y="1600200"/>
-            <a:ext cx="10408615" cy="1429512"/>
+            <a:off x="1371600" y="1645920"/>
+            <a:ext cx="10271455" cy="1188720"/>
           </a:xfrm>
           <a:prstGeom prst="rect">
             <a:avLst/>
@@ -6420,13 +7730,13 @@
           <a:p>
             <a:pPr algn="l"/>
             <a:r>
-              <a:rPr sz="2200" b="0" i="0">
+              <a:rPr sz="2400" b="0" i="0">
                 <a:solidFill>
                   <a:srgbClr val="202122"/>
                 </a:solidFill>
                 <a:latin typeface="Calibri"/>
               </a:rPr>
-              <a:t>Name three sources of installation requirements.</a:t>
+              <a:t>Name the three sources of installation requirements.</a:t>
             </a:r>
           </a:p>
         </p:txBody>
@@ -6439,8 +7749,8 @@
         </p:nvSpPr>
         <p:spPr>
           <a:xfrm>
-            <a:off x="548640" y="3212592"/>
-            <a:ext cx="411480" cy="411480"/>
+            <a:off x="548640" y="3108960"/>
+            <a:ext cx="502920" cy="502920"/>
           </a:xfrm>
           <a:prstGeom prst="ellipse">
             <a:avLst/>
@@ -6473,7 +7783,7 @@
           <a:p>
             <a:pPr algn="ctr"/>
             <a:r>
-              <a:rPr sz="1400" b="1">
+              <a:rPr sz="1600" b="1">
                 <a:solidFill>
                   <a:srgbClr val="FFFFFF"/>
                 </a:solidFill>
@@ -6492,8 +7802,8 @@
         </p:nvSpPr>
         <p:spPr>
           <a:xfrm>
-            <a:off x="1234440" y="3194304"/>
-            <a:ext cx="10408615" cy="1429512"/>
+            <a:off x="1371600" y="3063240"/>
+            <a:ext cx="10271455" cy="1188720"/>
           </a:xfrm>
           <a:prstGeom prst="rect">
             <a:avLst/>
@@ -6506,13 +7816,13 @@
           <a:p>
             <a:pPr algn="l"/>
             <a:r>
-              <a:rPr sz="2200" b="0" i="0">
+              <a:rPr sz="2400" b="0" i="0">
                 <a:solidFill>
                   <a:srgbClr val="202122"/>
                 </a:solidFill>
                 <a:latin typeface="Calibri"/>
               </a:rPr>
-              <a:t>What is an interface in system integration?</a:t>
+              <a:t>Why follow the manufacturer's torque settings?</a:t>
             </a:r>
           </a:p>
         </p:txBody>
@@ -6525,8 +7835,8 @@
         </p:nvSpPr>
         <p:spPr>
           <a:xfrm>
-            <a:off x="548640" y="4806695"/>
-            <a:ext cx="411480" cy="411480"/>
+            <a:off x="548640" y="4526280"/>
+            <a:ext cx="502920" cy="502920"/>
           </a:xfrm>
           <a:prstGeom prst="ellipse">
             <a:avLst/>
@@ -6559,7 +7869,7 @@
           <a:p>
             <a:pPr algn="ctr"/>
             <a:r>
-              <a:rPr sz="1400" b="1">
+              <a:rPr sz="1600" b="1">
                 <a:solidFill>
                   <a:srgbClr val="FFFFFF"/>
                 </a:solidFill>
@@ -6578,8 +7888,8 @@
         </p:nvSpPr>
         <p:spPr>
           <a:xfrm>
-            <a:off x="1234440" y="4788408"/>
-            <a:ext cx="10408615" cy="1429512"/>
+            <a:off x="1371600" y="4480560"/>
+            <a:ext cx="10271455" cy="1188720"/>
           </a:xfrm>
           <a:prstGeom prst="rect">
             <a:avLst/>
@@ -6592,13 +7902,46 @@
           <a:p>
             <a:pPr algn="l"/>
             <a:r>
-              <a:rPr sz="2200" b="0" i="0">
+              <a:rPr sz="2400" b="0" i="0">
                 <a:solidFill>
                   <a:srgbClr val="202122"/>
                 </a:solidFill>
                 <a:latin typeface="Calibri"/>
               </a:rPr>
-              <a:t>Why test interfaces before the whole system?</a:t>
+              <a:t>Which regulations cover work equipment safety?</a:t>
+            </a:r>
+          </a:p>
+        </p:txBody>
+      </p:sp>
+      <p:sp>
+        <p:nvSpPr>
+          <p:cNvPr id="12" name="TextBox 11"/>
+          <p:cNvSpPr txBox="1"/>
+          <p:nvPr/>
+        </p:nvSpPr>
+        <p:spPr>
+          <a:xfrm>
+            <a:off x="548640" y="5852160"/>
+            <a:ext cx="11094415" cy="365760"/>
+          </a:xfrm>
+          <a:prstGeom prst="rect">
+            <a:avLst/>
+          </a:prstGeom>
+          <a:noFill/>
+        </p:spPr>
+        <p:txBody>
+          <a:bodyPr wrap="square" anchor="t" lIns="0" rIns="0" tIns="0" bIns="0"/>
+          <a:lstStyle/>
+          <a:p>
+            <a:pPr algn="l"/>
+            <a:r>
+              <a:rPr sz="1300" b="0" i="1">
+                <a:solidFill>
+                  <a:srgbClr val="54595D"/>
+                </a:solidFill>
+                <a:latin typeface="Calibri"/>
+              </a:rPr>
+              <a:t>Answer on mini whiteboards or in your book. Answers are in the speaker notes.</a:t>
             </a:r>
           </a:p>
         </p:txBody>
@@ -6690,7 +8033,7 @@
                 </a:solidFill>
                 <a:latin typeface="Cambria"/>
               </a:rPr>
-              <a:t>Answers</a:t>
+              <a:t>Integrating systems</a:t>
             </a:r>
           </a:p>
         </p:txBody>
@@ -6763,14 +8106,129 @@
       </p:sp>
       <p:sp>
         <p:nvSpPr>
-          <p:cNvPr id="6" name="Oval 5"/>
+          <p:cNvPr id="6" name="TextBox 5"/>
+          <p:cNvSpPr txBox="1"/>
+          <p:nvPr/>
+        </p:nvSpPr>
+        <p:spPr>
+          <a:xfrm>
+            <a:off x="548640" y="1554480"/>
+            <a:ext cx="6720840" cy="4617720"/>
+          </a:xfrm>
+          <a:prstGeom prst="rect">
+            <a:avLst/>
+          </a:prstGeom>
+          <a:noFill/>
+        </p:spPr>
+        <p:txBody>
+          <a:bodyPr wrap="square" lIns="0" rIns="0" tIns="0" bIns="0">
+            <a:spAutoFit/>
+          </a:bodyPr>
+          <a:lstStyle/>
+          <a:p>
+            <a:pPr>
+              <a:spcAft>
+                <a:spcPts val="1320"/>
+              </a:spcAft>
+            </a:pPr>
+            <a:r>
+              <a:rPr sz="2200" b="0">
+                <a:solidFill>
+                  <a:srgbClr val="202122"/>
+                </a:solidFill>
+                <a:latin typeface="Calibri"/>
+              </a:rPr>
+              <a:t>Integration brings separate sub-systems together into one working system.</a:t>
+            </a:r>
+          </a:p>
+          <a:p>
+            <a:pPr>
+              <a:spcAft>
+                <a:spcPts val="1320"/>
+              </a:spcAft>
+            </a:pPr>
+            <a:r>
+              <a:rPr sz="2200" b="0">
+                <a:solidFill>
+                  <a:srgbClr val="202122"/>
+                </a:solidFill>
+                <a:latin typeface="Calibri"/>
+              </a:rPr>
+              <a:t>Plan the interfaces (where sub-systems connect) and the sequence. Combine the sub-systems. Connect their functions: mechanical links, electrical supplies and control signals. Test each interface, then the whole system. Finally commission it to prove it works as specified.</a:t>
+            </a:r>
+          </a:p>
+          <a:p>
+            <a:pPr>
+              <a:spcAft>
+                <a:spcPts val="1320"/>
+              </a:spcAft>
+            </a:pPr>
+            <a:r>
+              <a:rPr sz="2200" b="0">
+                <a:solidFill>
+                  <a:srgbClr val="202122"/>
+                </a:solidFill>
+                <a:latin typeface="Calibri"/>
+              </a:rPr>
+              <a:t>Testing interfaces one at a time makes faults much easier to find than switching everything on at once.</a:t>
+            </a:r>
+          </a:p>
+        </p:txBody>
+      </p:sp>
+      <p:sp>
+        <p:nvSpPr>
+          <p:cNvPr id="7" name="Rounded Rectangle 6"/>
           <p:cNvSpPr/>
           <p:nvPr/>
         </p:nvSpPr>
         <p:spPr>
           <a:xfrm>
-            <a:off x="548640" y="1618488"/>
-            <a:ext cx="411480" cy="411480"/>
+            <a:off x="7772400" y="1554480"/>
+            <a:ext cx="3867912" cy="4526280"/>
+          </a:xfrm>
+          <a:prstGeom prst="roundRect">
+            <a:avLst>
+              <a:gd name="adj" fmla="val 8000"/>
+            </a:avLst>
+          </a:prstGeom>
+          <a:solidFill>
+            <a:srgbClr val="03306E"/>
+          </a:solidFill>
+          <a:ln>
+            <a:noFill/>
+          </a:ln>
+          <a:effectLst/>
+        </p:spPr>
+        <p:style>
+          <a:lnRef idx="1">
+            <a:schemeClr val="accent1"/>
+          </a:lnRef>
+          <a:fillRef idx="3">
+            <a:schemeClr val="accent1"/>
+          </a:fillRef>
+          <a:effectRef idx="2">
+            <a:schemeClr val="accent1"/>
+          </a:effectRef>
+          <a:fontRef idx="minor">
+            <a:schemeClr val="lt1"/>
+          </a:fontRef>
+        </p:style>
+        <p:txBody>
+          <a:bodyPr rtlCol="0" anchor="ctr"/>
+          <a:lstStyle/>
+          <a:p/>
+        </p:txBody>
+      </p:sp>
+      <p:sp>
+        <p:nvSpPr>
+          <p:cNvPr id="8" name="Oval 7"/>
+          <p:cNvSpPr/>
+          <p:nvPr/>
+        </p:nvSpPr>
+        <p:spPr>
+          <a:xfrm>
+            <a:off x="8046720" y="1828800"/>
+            <a:ext cx="548640" cy="548640"/>
           </a:xfrm>
           <a:prstGeom prst="ellipse">
             <a:avLst/>
@@ -6803,110 +8261,13 @@
           <a:p>
             <a:pPr algn="ctr"/>
             <a:r>
-              <a:rPr sz="1400" b="1">
+              <a:rPr sz="1300" b="1">
                 <a:solidFill>
                   <a:srgbClr val="FFFFFF"/>
                 </a:solidFill>
                 <a:latin typeface="Calibri"/>
               </a:rPr>
-              <a:t>1</a:t>
-            </a:r>
-          </a:p>
-        </p:txBody>
-      </p:sp>
-      <p:sp>
-        <p:nvSpPr>
-          <p:cNvPr id="7" name="TextBox 6"/>
-          <p:cNvSpPr txBox="1"/>
-          <p:nvPr/>
-        </p:nvSpPr>
-        <p:spPr>
-          <a:xfrm>
-            <a:off x="1234440" y="1600200"/>
-            <a:ext cx="10408615" cy="1429512"/>
-          </a:xfrm>
-          <a:prstGeom prst="rect">
-            <a:avLst/>
-          </a:prstGeom>
-          <a:noFill/>
-        </p:spPr>
-        <p:txBody>
-          <a:bodyPr wrap="square" anchor="t" lIns="0" rIns="0" tIns="0" bIns="0"/>
-          <a:lstStyle/>
-          <a:p>
-            <a:pPr algn="l"/>
-            <a:r>
-              <a:rPr sz="1800" b="0" i="0">
-                <a:solidFill>
-                  <a:srgbClr val="54595D"/>
-                </a:solidFill>
-                <a:latin typeface="Calibri"/>
-              </a:rPr>
-              <a:t>Name three sources of installation requirements.</a:t>
-            </a:r>
-          </a:p>
-          <a:p>
-            <a:r>
-              <a:rPr sz="1800" b="1">
-                <a:solidFill>
-                  <a:srgbClr val="03306E"/>
-                </a:solidFill>
-                <a:latin typeface="Calibri"/>
-              </a:rPr>
-              <a:t>Customer, regulatory, manufacturer specifications.</a:t>
-            </a:r>
-          </a:p>
-        </p:txBody>
-      </p:sp>
-      <p:sp>
-        <p:nvSpPr>
-          <p:cNvPr id="8" name="Oval 7"/>
-          <p:cNvSpPr/>
-          <p:nvPr/>
-        </p:nvSpPr>
-        <p:spPr>
-          <a:xfrm>
-            <a:off x="548640" y="3212592"/>
-            <a:ext cx="411480" cy="411480"/>
-          </a:xfrm>
-          <a:prstGeom prst="ellipse">
-            <a:avLst/>
-          </a:prstGeom>
-          <a:solidFill>
-            <a:srgbClr val="E0463A"/>
-          </a:solidFill>
-          <a:ln>
-            <a:noFill/>
-          </a:ln>
-          <a:effectLst/>
-        </p:spPr>
-        <p:style>
-          <a:lnRef idx="1">
-            <a:schemeClr val="accent1"/>
-          </a:lnRef>
-          <a:fillRef idx="3">
-            <a:schemeClr val="accent1"/>
-          </a:fillRef>
-          <a:effectRef idx="2">
-            <a:schemeClr val="accent1"/>
-          </a:effectRef>
-          <a:fontRef idx="minor">
-            <a:schemeClr val="lt1"/>
-          </a:fontRef>
-        </p:style>
-        <p:txBody>
-          <a:bodyPr rtlCol="0" anchor="ctr" lIns="0" rIns="0" tIns="0" bIns="0"/>
-          <a:lstStyle/>
-          <a:p>
-            <a:pPr algn="ctr"/>
-            <a:r>
-              <a:rPr sz="1400" b="1">
-                <a:solidFill>
-                  <a:srgbClr val="FFFFFF"/>
-                </a:solidFill>
-                <a:latin typeface="Calibri"/>
-              </a:rPr>
-              <a:t>2</a:t>
+              <a:t>e.g.</a:t>
             </a:r>
           </a:p>
         </p:txBody>
@@ -6919,8 +8280,8 @@
         </p:nvSpPr>
         <p:spPr>
           <a:xfrm>
-            <a:off x="1234440" y="3194304"/>
-            <a:ext cx="10408615" cy="1429512"/>
+            <a:off x="8046720" y="2560320"/>
+            <a:ext cx="3291840" cy="365760"/>
           </a:xfrm>
           <a:prstGeom prst="rect">
             <a:avLst/>
@@ -6933,121 +8294,46 @@
           <a:p>
             <a:pPr algn="l"/>
             <a:r>
-              <a:rPr sz="1800" b="0" i="0">
-                <a:solidFill>
-                  <a:srgbClr val="54595D"/>
-                </a:solidFill>
-                <a:latin typeface="Calibri"/>
-              </a:rPr>
-              <a:t>What is an interface in system integration?</a:t>
-            </a:r>
-          </a:p>
-          <a:p>
-            <a:r>
-              <a:rPr sz="1800" b="1">
-                <a:solidFill>
-                  <a:srgbClr val="03306E"/>
-                </a:solidFill>
-                <a:latin typeface="Calibri"/>
-              </a:rPr>
-              <a:t>A point where two sub-systems connect or interact.</a:t>
-            </a:r>
-          </a:p>
-        </p:txBody>
-      </p:sp>
-      <p:sp>
-        <p:nvSpPr>
-          <p:cNvPr id="10" name="Oval 9"/>
-          <p:cNvSpPr/>
-          <p:nvPr/>
-        </p:nvSpPr>
-        <p:spPr>
-          <a:xfrm>
-            <a:off x="548640" y="4806695"/>
-            <a:ext cx="411480" cy="411480"/>
-          </a:xfrm>
-          <a:prstGeom prst="ellipse">
-            <a:avLst/>
-          </a:prstGeom>
-          <a:solidFill>
-            <a:srgbClr val="E0463A"/>
-          </a:solidFill>
-          <a:ln>
-            <a:noFill/>
-          </a:ln>
-          <a:effectLst/>
-        </p:spPr>
-        <p:style>
-          <a:lnRef idx="1">
-            <a:schemeClr val="accent1"/>
-          </a:lnRef>
-          <a:fillRef idx="3">
-            <a:schemeClr val="accent1"/>
-          </a:fillRef>
-          <a:effectRef idx="2">
-            <a:schemeClr val="accent1"/>
-          </a:effectRef>
-          <a:fontRef idx="minor">
-            <a:schemeClr val="lt1"/>
-          </a:fontRef>
-        </p:style>
-        <p:txBody>
-          <a:bodyPr rtlCol="0" anchor="ctr" lIns="0" rIns="0" tIns="0" bIns="0"/>
-          <a:lstStyle/>
-          <a:p>
-            <a:pPr algn="ctr"/>
-            <a:r>
-              <a:rPr sz="1400" b="1">
+              <a:rPr sz="1300" b="1" i="0">
+                <a:solidFill>
+                  <a:srgbClr val="A9C8F0"/>
+                </a:solidFill>
+                <a:latin typeface="Calibri"/>
+              </a:rPr>
+              <a:t>EXAMPLE</a:t>
+            </a:r>
+          </a:p>
+        </p:txBody>
+      </p:sp>
+      <p:sp>
+        <p:nvSpPr>
+          <p:cNvPr id="10" name="TextBox 9"/>
+          <p:cNvSpPr txBox="1"/>
+          <p:nvPr/>
+        </p:nvSpPr>
+        <p:spPr>
+          <a:xfrm>
+            <a:off x="8046720" y="2971800"/>
+            <a:ext cx="3291840" cy="2971800"/>
+          </a:xfrm>
+          <a:prstGeom prst="rect">
+            <a:avLst/>
+          </a:prstGeom>
+          <a:noFill/>
+        </p:spPr>
+        <p:txBody>
+          <a:bodyPr wrap="square" anchor="t" lIns="0" rIns="0" tIns="0" bIns="0"/>
+          <a:lstStyle/>
+          <a:p>
+            <a:pPr algn="l"/>
+            <a:r>
+              <a:rPr sz="1900" b="0" i="0">
                 <a:solidFill>
                   <a:srgbClr val="FFFFFF"/>
                 </a:solidFill>
-                <a:latin typeface="Calibri"/>
-              </a:rPr>
-              <a:t>3</a:t>
-            </a:r>
-          </a:p>
-        </p:txBody>
-      </p:sp>
-      <p:sp>
-        <p:nvSpPr>
-          <p:cNvPr id="11" name="TextBox 10"/>
-          <p:cNvSpPr txBox="1"/>
-          <p:nvPr/>
-        </p:nvSpPr>
-        <p:spPr>
-          <a:xfrm>
-            <a:off x="1234440" y="4788408"/>
-            <a:ext cx="10408615" cy="1429512"/>
-          </a:xfrm>
-          <a:prstGeom prst="rect">
-            <a:avLst/>
-          </a:prstGeom>
-          <a:noFill/>
-        </p:spPr>
-        <p:txBody>
-          <a:bodyPr wrap="square" anchor="t" lIns="0" rIns="0" tIns="0" bIns="0"/>
-          <a:lstStyle/>
-          <a:p>
-            <a:pPr algn="l"/>
-            <a:r>
-              <a:rPr sz="1800" b="0" i="0">
-                <a:solidFill>
-                  <a:srgbClr val="54595D"/>
-                </a:solidFill>
-                <a:latin typeface="Calibri"/>
-              </a:rPr>
-              <a:t>Why test interfaces before the whole system?</a:t>
-            </a:r>
-          </a:p>
-          <a:p>
-            <a:r>
-              <a:rPr sz="1800" b="1">
-                <a:solidFill>
-                  <a:srgbClr val="03306E"/>
-                </a:solidFill>
-                <a:latin typeface="Calibri"/>
-              </a:rPr>
-              <a:t>Faults are easier to find and fix.</a:t>
+                <a:latin typeface="Cambria"/>
+              </a:rPr>
+              <a:t>A packaging line: the conveyor, sensor system and robotic arm are each tested, then linked one at a time, then run together at slow speed before full production.</a:t>
             </a:r>
           </a:p>
         </p:txBody>
@@ -7139,7 +8425,7 @@
                 </a:solidFill>
                 <a:latin typeface="Cambria"/>
               </a:rPr>
-              <a:t>Activity: Integration plan</a:t>
+              <a:t>Integrating systems</a:t>
             </a:r>
           </a:p>
         </p:txBody>
@@ -7212,19 +8498,59 @@
       </p:sp>
       <p:sp>
         <p:nvSpPr>
-          <p:cNvPr id="6" name="Rounded Rectangle 5"/>
+          <p:cNvPr id="6" name="Rectangle 5"/>
           <p:cNvSpPr/>
           <p:nvPr/>
         </p:nvSpPr>
         <p:spPr>
           <a:xfrm>
-            <a:off x="548640" y="1508760"/>
-            <a:ext cx="2011680" cy="457200"/>
-          </a:xfrm>
-          <a:prstGeom prst="roundRect">
-            <a:avLst>
-              <a:gd name="adj" fmla="val 50000"/>
-            </a:avLst>
+            <a:off x="1603217" y="2793492"/>
+            <a:ext cx="8985260" cy="36576"/>
+          </a:xfrm>
+          <a:prstGeom prst="rect">
+            <a:avLst/>
+          </a:prstGeom>
+          <a:solidFill>
+            <a:srgbClr val="A9C8F0"/>
+          </a:solidFill>
+          <a:ln>
+            <a:noFill/>
+          </a:ln>
+          <a:effectLst/>
+        </p:spPr>
+        <p:style>
+          <a:lnRef idx="1">
+            <a:schemeClr val="accent1"/>
+          </a:lnRef>
+          <a:fillRef idx="3">
+            <a:schemeClr val="accent1"/>
+          </a:fillRef>
+          <a:effectRef idx="2">
+            <a:schemeClr val="accent1"/>
+          </a:effectRef>
+          <a:fontRef idx="minor">
+            <a:schemeClr val="lt1"/>
+          </a:fontRef>
+        </p:style>
+        <p:txBody>
+          <a:bodyPr rtlCol="0" anchor="ctr"/>
+          <a:lstStyle/>
+          <a:p/>
+        </p:txBody>
+      </p:sp>
+      <p:sp>
+        <p:nvSpPr>
+          <p:cNvPr id="7" name="Oval 6"/>
+          <p:cNvSpPr/>
+          <p:nvPr/>
+        </p:nvSpPr>
+        <p:spPr>
+          <a:xfrm>
+            <a:off x="1283177" y="2491740"/>
+            <a:ext cx="640080" cy="640080"/>
+          </a:xfrm>
+          <a:prstGeom prst="ellipse">
+            <a:avLst/>
           </a:prstGeom>
           <a:solidFill>
             <a:srgbClr val="E0463A"/>
@@ -7249,40 +8575,18 @@
           </a:fontRef>
         </p:style>
         <p:txBody>
-          <a:bodyPr rtlCol="0" anchor="ctr"/>
-          <a:lstStyle/>
-          <a:p/>
-        </p:txBody>
-      </p:sp>
-      <p:sp>
-        <p:nvSpPr>
-          <p:cNvPr id="7" name="TextBox 6"/>
-          <p:cNvSpPr txBox="1"/>
-          <p:nvPr/>
-        </p:nvSpPr>
-        <p:spPr>
-          <a:xfrm>
-            <a:off x="548640" y="1508760"/>
-            <a:ext cx="2011680" cy="457200"/>
-          </a:xfrm>
-          <a:prstGeom prst="rect">
-            <a:avLst/>
-          </a:prstGeom>
-          <a:noFill/>
-        </p:spPr>
-        <p:txBody>
-          <a:bodyPr wrap="square" anchor="ctr" lIns="0" rIns="0" tIns="0" bIns="0"/>
+          <a:bodyPr rtlCol="0" anchor="ctr" lIns="0" rIns="0" tIns="0" bIns="0"/>
           <a:lstStyle/>
           <a:p>
             <a:pPr algn="ctr"/>
             <a:r>
-              <a:rPr sz="1400" b="1" i="0">
+              <a:rPr sz="2000" b="1">
                 <a:solidFill>
                   <a:srgbClr val="FFFFFF"/>
                 </a:solidFill>
                 <a:latin typeface="Calibri"/>
               </a:rPr>
-              <a:t>20 minutes</a:t>
+              <a:t>1</a:t>
             </a:r>
           </a:p>
         </p:txBody>
@@ -7295,8 +8599,8 @@
         </p:nvSpPr>
         <p:spPr>
           <a:xfrm>
-            <a:off x="2743200" y="1508760"/>
-            <a:ext cx="4754880" cy="457200"/>
+            <a:off x="548640" y="3268979"/>
+            <a:ext cx="2109155" cy="731520"/>
           </a:xfrm>
           <a:prstGeom prst="rect">
             <a:avLst/>
@@ -7304,380 +8608,36 @@
           <a:noFill/>
         </p:spPr>
         <p:txBody>
-          <a:bodyPr wrap="square" anchor="ctr" lIns="0" rIns="0" tIns="0" bIns="0"/>
-          <a:lstStyle/>
-          <a:p>
-            <a:pPr algn="l"/>
-            <a:r>
-              <a:rPr sz="1400" b="0" i="1">
-                <a:solidFill>
-                  <a:srgbClr val="54595D"/>
-                </a:solidFill>
-                <a:latin typeface="Calibri"/>
-              </a:rPr>
-              <a:t>Pairs</a:t>
-            </a:r>
-          </a:p>
-        </p:txBody>
-      </p:sp>
-      <p:sp>
-        <p:nvSpPr>
-          <p:cNvPr id="9" name="Oval 8"/>
+          <a:bodyPr wrap="square" anchor="t" lIns="0" rIns="0" tIns="0" bIns="0"/>
+          <a:lstStyle/>
+          <a:p>
+            <a:pPr algn="ctr"/>
+            <a:r>
+              <a:rPr sz="1700" b="1" i="0">
+                <a:solidFill>
+                  <a:srgbClr val="03306E"/>
+                </a:solidFill>
+                <a:latin typeface="Calibri"/>
+              </a:rPr>
+              <a:t>Plan</a:t>
+            </a:r>
+          </a:p>
+        </p:txBody>
+      </p:sp>
+      <p:sp>
+        <p:nvSpPr>
+          <p:cNvPr id="9" name="Rounded Rectangle 8"/>
           <p:cNvSpPr/>
           <p:nvPr/>
         </p:nvSpPr>
         <p:spPr>
           <a:xfrm>
-            <a:off x="548640" y="2482596"/>
-            <a:ext cx="384048" cy="384048"/>
-          </a:xfrm>
-          <a:prstGeom prst="ellipse">
-            <a:avLst/>
-          </a:prstGeom>
-          <a:solidFill>
-            <a:srgbClr val="0645AD"/>
-          </a:solidFill>
-          <a:ln>
-            <a:noFill/>
-          </a:ln>
-          <a:effectLst/>
-        </p:spPr>
-        <p:style>
-          <a:lnRef idx="1">
-            <a:schemeClr val="accent1"/>
-          </a:lnRef>
-          <a:fillRef idx="3">
-            <a:schemeClr val="accent1"/>
-          </a:fillRef>
-          <a:effectRef idx="2">
-            <a:schemeClr val="accent1"/>
-          </a:effectRef>
-          <a:fontRef idx="minor">
-            <a:schemeClr val="lt1"/>
-          </a:fontRef>
-        </p:style>
-        <p:txBody>
-          <a:bodyPr rtlCol="0" anchor="ctr" lIns="0" rIns="0" tIns="0" bIns="0"/>
-          <a:lstStyle/>
-          <a:p>
-            <a:pPr algn="ctr"/>
-            <a:r>
-              <a:rPr sz="1300" b="1">
-                <a:solidFill>
-                  <a:srgbClr val="FFFFFF"/>
-                </a:solidFill>
-                <a:latin typeface="Calibri"/>
-              </a:rPr>
-              <a:t>1</a:t>
-            </a:r>
-          </a:p>
-        </p:txBody>
-      </p:sp>
-      <p:sp>
-        <p:nvSpPr>
-          <p:cNvPr id="10" name="TextBox 9"/>
-          <p:cNvSpPr txBox="1"/>
-          <p:nvPr/>
-        </p:nvSpPr>
-        <p:spPr>
-          <a:xfrm>
-            <a:off x="1143000" y="2240280"/>
-            <a:ext cx="5943600" cy="868680"/>
-          </a:xfrm>
-          <a:prstGeom prst="rect">
-            <a:avLst/>
-          </a:prstGeom>
-          <a:noFill/>
-        </p:spPr>
-        <p:txBody>
-          <a:bodyPr wrap="square" anchor="ctr" lIns="0" rIns="0" tIns="0" bIns="0"/>
-          <a:lstStyle/>
-          <a:p>
-            <a:pPr algn="l"/>
-            <a:r>
-              <a:rPr sz="1700" b="0" i="0">
-                <a:solidFill>
-                  <a:srgbClr val="202122"/>
-                </a:solidFill>
-                <a:latin typeface="Calibri"/>
-              </a:rPr>
-              <a:t>Take the conveyor from the starter.</a:t>
-            </a:r>
-          </a:p>
-        </p:txBody>
-      </p:sp>
-      <p:sp>
-        <p:nvSpPr>
-          <p:cNvPr id="11" name="Oval 10"/>
-          <p:cNvSpPr/>
-          <p:nvPr/>
-        </p:nvSpPr>
-        <p:spPr>
-          <a:xfrm>
-            <a:off x="548640" y="3461004"/>
-            <a:ext cx="384048" cy="384048"/>
-          </a:xfrm>
-          <a:prstGeom prst="ellipse">
-            <a:avLst/>
-          </a:prstGeom>
-          <a:solidFill>
-            <a:srgbClr val="0645AD"/>
-          </a:solidFill>
-          <a:ln>
-            <a:noFill/>
-          </a:ln>
-          <a:effectLst/>
-        </p:spPr>
-        <p:style>
-          <a:lnRef idx="1">
-            <a:schemeClr val="accent1"/>
-          </a:lnRef>
-          <a:fillRef idx="3">
-            <a:schemeClr val="accent1"/>
-          </a:fillRef>
-          <a:effectRef idx="2">
-            <a:schemeClr val="accent1"/>
-          </a:effectRef>
-          <a:fontRef idx="minor">
-            <a:schemeClr val="lt1"/>
-          </a:fontRef>
-        </p:style>
-        <p:txBody>
-          <a:bodyPr rtlCol="0" anchor="ctr" lIns="0" rIns="0" tIns="0" bIns="0"/>
-          <a:lstStyle/>
-          <a:p>
-            <a:pPr algn="ctr"/>
-            <a:r>
-              <a:rPr sz="1300" b="1">
-                <a:solidFill>
-                  <a:srgbClr val="FFFFFF"/>
-                </a:solidFill>
-                <a:latin typeface="Calibri"/>
-              </a:rPr>
-              <a:t>2</a:t>
-            </a:r>
-          </a:p>
-        </p:txBody>
-      </p:sp>
-      <p:sp>
-        <p:nvSpPr>
-          <p:cNvPr id="12" name="TextBox 11"/>
-          <p:cNvSpPr txBox="1"/>
-          <p:nvPr/>
-        </p:nvSpPr>
-        <p:spPr>
-          <a:xfrm>
-            <a:off x="1143000" y="3218688"/>
-            <a:ext cx="5943600" cy="868680"/>
-          </a:xfrm>
-          <a:prstGeom prst="rect">
-            <a:avLst/>
-          </a:prstGeom>
-          <a:noFill/>
-        </p:spPr>
-        <p:txBody>
-          <a:bodyPr wrap="square" anchor="ctr" lIns="0" rIns="0" tIns="0" bIns="0"/>
-          <a:lstStyle/>
-          <a:p>
-            <a:pPr algn="l"/>
-            <a:r>
-              <a:rPr sz="1700" b="0" i="0">
-                <a:solidFill>
-                  <a:srgbClr val="202122"/>
-                </a:solidFill>
-                <a:latin typeface="Calibri"/>
-              </a:rPr>
-              <a:t>List its sub-systems and interfaces.</a:t>
-            </a:r>
-          </a:p>
-        </p:txBody>
-      </p:sp>
-      <p:sp>
-        <p:nvSpPr>
-          <p:cNvPr id="13" name="Oval 12"/>
-          <p:cNvSpPr/>
-          <p:nvPr/>
-        </p:nvSpPr>
-        <p:spPr>
-          <a:xfrm>
-            <a:off x="548640" y="4439412"/>
-            <a:ext cx="384048" cy="384048"/>
-          </a:xfrm>
-          <a:prstGeom prst="ellipse">
-            <a:avLst/>
-          </a:prstGeom>
-          <a:solidFill>
-            <a:srgbClr val="0645AD"/>
-          </a:solidFill>
-          <a:ln>
-            <a:noFill/>
-          </a:ln>
-          <a:effectLst/>
-        </p:spPr>
-        <p:style>
-          <a:lnRef idx="1">
-            <a:schemeClr val="accent1"/>
-          </a:lnRef>
-          <a:fillRef idx="3">
-            <a:schemeClr val="accent1"/>
-          </a:fillRef>
-          <a:effectRef idx="2">
-            <a:schemeClr val="accent1"/>
-          </a:effectRef>
-          <a:fontRef idx="minor">
-            <a:schemeClr val="lt1"/>
-          </a:fontRef>
-        </p:style>
-        <p:txBody>
-          <a:bodyPr rtlCol="0" anchor="ctr" lIns="0" rIns="0" tIns="0" bIns="0"/>
-          <a:lstStyle/>
-          <a:p>
-            <a:pPr algn="ctr"/>
-            <a:r>
-              <a:rPr sz="1300" b="1">
-                <a:solidFill>
-                  <a:srgbClr val="FFFFFF"/>
-                </a:solidFill>
-                <a:latin typeface="Calibri"/>
-              </a:rPr>
-              <a:t>3</a:t>
-            </a:r>
-          </a:p>
-        </p:txBody>
-      </p:sp>
-      <p:sp>
-        <p:nvSpPr>
-          <p:cNvPr id="14" name="TextBox 13"/>
-          <p:cNvSpPr txBox="1"/>
-          <p:nvPr/>
-        </p:nvSpPr>
-        <p:spPr>
-          <a:xfrm>
-            <a:off x="1143000" y="4197096"/>
-            <a:ext cx="5943600" cy="868680"/>
-          </a:xfrm>
-          <a:prstGeom prst="rect">
-            <a:avLst/>
-          </a:prstGeom>
-          <a:noFill/>
-        </p:spPr>
-        <p:txBody>
-          <a:bodyPr wrap="square" anchor="ctr" lIns="0" rIns="0" tIns="0" bIns="0"/>
-          <a:lstStyle/>
-          <a:p>
-            <a:pPr algn="l"/>
-            <a:r>
-              <a:rPr sz="1700" b="0" i="0">
-                <a:solidFill>
-                  <a:srgbClr val="202122"/>
-                </a:solidFill>
-                <a:latin typeface="Calibri"/>
-              </a:rPr>
-              <a:t>Put the integration steps in order.</a:t>
-            </a:r>
-          </a:p>
-        </p:txBody>
-      </p:sp>
-      <p:sp>
-        <p:nvSpPr>
-          <p:cNvPr id="15" name="Oval 14"/>
-          <p:cNvSpPr/>
-          <p:nvPr/>
-        </p:nvSpPr>
-        <p:spPr>
-          <a:xfrm>
-            <a:off x="548640" y="5417820"/>
-            <a:ext cx="384048" cy="384048"/>
-          </a:xfrm>
-          <a:prstGeom prst="ellipse">
-            <a:avLst/>
-          </a:prstGeom>
-          <a:solidFill>
-            <a:srgbClr val="0645AD"/>
-          </a:solidFill>
-          <a:ln>
-            <a:noFill/>
-          </a:ln>
-          <a:effectLst/>
-        </p:spPr>
-        <p:style>
-          <a:lnRef idx="1">
-            <a:schemeClr val="accent1"/>
-          </a:lnRef>
-          <a:fillRef idx="3">
-            <a:schemeClr val="accent1"/>
-          </a:fillRef>
-          <a:effectRef idx="2">
-            <a:schemeClr val="accent1"/>
-          </a:effectRef>
-          <a:fontRef idx="minor">
-            <a:schemeClr val="lt1"/>
-          </a:fontRef>
-        </p:style>
-        <p:txBody>
-          <a:bodyPr rtlCol="0" anchor="ctr" lIns="0" rIns="0" tIns="0" bIns="0"/>
-          <a:lstStyle/>
-          <a:p>
-            <a:pPr algn="ctr"/>
-            <a:r>
-              <a:rPr sz="1300" b="1">
-                <a:solidFill>
-                  <a:srgbClr val="FFFFFF"/>
-                </a:solidFill>
-                <a:latin typeface="Calibri"/>
-              </a:rPr>
-              <a:t>4</a:t>
-            </a:r>
-          </a:p>
-        </p:txBody>
-      </p:sp>
-      <p:sp>
-        <p:nvSpPr>
-          <p:cNvPr id="16" name="TextBox 15"/>
-          <p:cNvSpPr txBox="1"/>
-          <p:nvPr/>
-        </p:nvSpPr>
-        <p:spPr>
-          <a:xfrm>
-            <a:off x="1143000" y="5175504"/>
-            <a:ext cx="5943600" cy="868680"/>
-          </a:xfrm>
-          <a:prstGeom prst="rect">
-            <a:avLst/>
-          </a:prstGeom>
-          <a:noFill/>
-        </p:spPr>
-        <p:txBody>
-          <a:bodyPr wrap="square" anchor="ctr" lIns="0" rIns="0" tIns="0" bIns="0"/>
-          <a:lstStyle/>
-          <a:p>
-            <a:pPr algn="l"/>
-            <a:r>
-              <a:rPr sz="1700" b="0" i="0">
-                <a:solidFill>
-                  <a:srgbClr val="202122"/>
-                </a:solidFill>
-                <a:latin typeface="Calibri"/>
-              </a:rPr>
-              <a:t>Write a test for each interface.</a:t>
-            </a:r>
-          </a:p>
-        </p:txBody>
-      </p:sp>
-      <p:sp>
-        <p:nvSpPr>
-          <p:cNvPr id="17" name="Rounded Rectangle 16"/>
-          <p:cNvSpPr/>
-          <p:nvPr/>
-        </p:nvSpPr>
-        <p:spPr>
-          <a:xfrm>
-            <a:off x="7772400" y="1508760"/>
-            <a:ext cx="3867912" cy="4572000"/>
+            <a:off x="548640" y="4046220"/>
+            <a:ext cx="2109155" cy="1234439"/>
           </a:xfrm>
           <a:prstGeom prst="roundRect">
             <a:avLst>
-              <a:gd name="adj" fmla="val 8000"/>
+              <a:gd name="adj" fmla="val 6000"/>
             </a:avLst>
           </a:prstGeom>
           <a:solidFill>
@@ -7710,14 +8670,340 @@
       </p:sp>
       <p:sp>
         <p:nvSpPr>
+          <p:cNvPr id="10" name="TextBox 9"/>
+          <p:cNvSpPr txBox="1"/>
+          <p:nvPr/>
+        </p:nvSpPr>
+        <p:spPr>
+          <a:xfrm>
+            <a:off x="685800" y="4183380"/>
+            <a:ext cx="1834835" cy="960119"/>
+          </a:xfrm>
+          <a:prstGeom prst="rect">
+            <a:avLst/>
+          </a:prstGeom>
+          <a:noFill/>
+        </p:spPr>
+        <p:txBody>
+          <a:bodyPr wrap="square" anchor="t" lIns="0" rIns="0" tIns="0" bIns="0"/>
+          <a:lstStyle/>
+          <a:p>
+            <a:pPr algn="l"/>
+            <a:r>
+              <a:rPr sz="1800" b="0" i="0">
+                <a:solidFill>
+                  <a:srgbClr val="202122"/>
+                </a:solidFill>
+                <a:latin typeface="Calibri"/>
+              </a:rPr>
+              <a:t>Define interfaces and sequence.</a:t>
+            </a:r>
+          </a:p>
+        </p:txBody>
+      </p:sp>
+      <p:sp>
+        <p:nvSpPr>
+          <p:cNvPr id="11" name="Oval 10"/>
+          <p:cNvSpPr/>
+          <p:nvPr/>
+        </p:nvSpPr>
+        <p:spPr>
+          <a:xfrm>
+            <a:off x="3529492" y="2491740"/>
+            <a:ext cx="640080" cy="640080"/>
+          </a:xfrm>
+          <a:prstGeom prst="ellipse">
+            <a:avLst/>
+          </a:prstGeom>
+          <a:solidFill>
+            <a:srgbClr val="E0463A"/>
+          </a:solidFill>
+          <a:ln>
+            <a:noFill/>
+          </a:ln>
+          <a:effectLst/>
+        </p:spPr>
+        <p:style>
+          <a:lnRef idx="1">
+            <a:schemeClr val="accent1"/>
+          </a:lnRef>
+          <a:fillRef idx="3">
+            <a:schemeClr val="accent1"/>
+          </a:fillRef>
+          <a:effectRef idx="2">
+            <a:schemeClr val="accent1"/>
+          </a:effectRef>
+          <a:fontRef idx="minor">
+            <a:schemeClr val="lt1"/>
+          </a:fontRef>
+        </p:style>
+        <p:txBody>
+          <a:bodyPr rtlCol="0" anchor="ctr" lIns="0" rIns="0" tIns="0" bIns="0"/>
+          <a:lstStyle/>
+          <a:p>
+            <a:pPr algn="ctr"/>
+            <a:r>
+              <a:rPr sz="2000" b="1">
+                <a:solidFill>
+                  <a:srgbClr val="FFFFFF"/>
+                </a:solidFill>
+                <a:latin typeface="Calibri"/>
+              </a:rPr>
+              <a:t>2</a:t>
+            </a:r>
+          </a:p>
+        </p:txBody>
+      </p:sp>
+      <p:sp>
+        <p:nvSpPr>
+          <p:cNvPr id="12" name="TextBox 11"/>
+          <p:cNvSpPr txBox="1"/>
+          <p:nvPr/>
+        </p:nvSpPr>
+        <p:spPr>
+          <a:xfrm>
+            <a:off x="2794955" y="3268979"/>
+            <a:ext cx="2109155" cy="731520"/>
+          </a:xfrm>
+          <a:prstGeom prst="rect">
+            <a:avLst/>
+          </a:prstGeom>
+          <a:noFill/>
+        </p:spPr>
+        <p:txBody>
+          <a:bodyPr wrap="square" anchor="t" lIns="0" rIns="0" tIns="0" bIns="0"/>
+          <a:lstStyle/>
+          <a:p>
+            <a:pPr algn="ctr"/>
+            <a:r>
+              <a:rPr sz="1700" b="1" i="0">
+                <a:solidFill>
+                  <a:srgbClr val="03306E"/>
+                </a:solidFill>
+                <a:latin typeface="Calibri"/>
+              </a:rPr>
+              <a:t>Combine</a:t>
+            </a:r>
+          </a:p>
+        </p:txBody>
+      </p:sp>
+      <p:sp>
+        <p:nvSpPr>
+          <p:cNvPr id="13" name="Rounded Rectangle 12"/>
+          <p:cNvSpPr/>
+          <p:nvPr/>
+        </p:nvSpPr>
+        <p:spPr>
+          <a:xfrm>
+            <a:off x="2794955" y="4046220"/>
+            <a:ext cx="2109155" cy="1234439"/>
+          </a:xfrm>
+          <a:prstGeom prst="roundRect">
+            <a:avLst>
+              <a:gd name="adj" fmla="val 6000"/>
+            </a:avLst>
+          </a:prstGeom>
+          <a:solidFill>
+            <a:srgbClr val="EAF3FF"/>
+          </a:solidFill>
+          <a:ln>
+            <a:noFill/>
+          </a:ln>
+          <a:effectLst/>
+        </p:spPr>
+        <p:style>
+          <a:lnRef idx="1">
+            <a:schemeClr val="accent1"/>
+          </a:lnRef>
+          <a:fillRef idx="3">
+            <a:schemeClr val="accent1"/>
+          </a:fillRef>
+          <a:effectRef idx="2">
+            <a:schemeClr val="accent1"/>
+          </a:effectRef>
+          <a:fontRef idx="minor">
+            <a:schemeClr val="lt1"/>
+          </a:fontRef>
+        </p:style>
+        <p:txBody>
+          <a:bodyPr rtlCol="0" anchor="ctr"/>
+          <a:lstStyle/>
+          <a:p/>
+        </p:txBody>
+      </p:sp>
+      <p:sp>
+        <p:nvSpPr>
+          <p:cNvPr id="14" name="TextBox 13"/>
+          <p:cNvSpPr txBox="1"/>
+          <p:nvPr/>
+        </p:nvSpPr>
+        <p:spPr>
+          <a:xfrm>
+            <a:off x="2932115" y="4183380"/>
+            <a:ext cx="1834835" cy="960119"/>
+          </a:xfrm>
+          <a:prstGeom prst="rect">
+            <a:avLst/>
+          </a:prstGeom>
+          <a:noFill/>
+        </p:spPr>
+        <p:txBody>
+          <a:bodyPr wrap="square" anchor="t" lIns="0" rIns="0" tIns="0" bIns="0"/>
+          <a:lstStyle/>
+          <a:p>
+            <a:pPr algn="l"/>
+            <a:r>
+              <a:rPr sz="1800" b="0" i="0">
+                <a:solidFill>
+                  <a:srgbClr val="202122"/>
+                </a:solidFill>
+                <a:latin typeface="Calibri"/>
+              </a:rPr>
+              <a:t>Bring sub-systems together.</a:t>
+            </a:r>
+          </a:p>
+        </p:txBody>
+      </p:sp>
+      <p:sp>
+        <p:nvSpPr>
+          <p:cNvPr id="15" name="Oval 14"/>
+          <p:cNvSpPr/>
+          <p:nvPr/>
+        </p:nvSpPr>
+        <p:spPr>
+          <a:xfrm>
+            <a:off x="5775807" y="2491740"/>
+            <a:ext cx="640080" cy="640080"/>
+          </a:xfrm>
+          <a:prstGeom prst="ellipse">
+            <a:avLst/>
+          </a:prstGeom>
+          <a:solidFill>
+            <a:srgbClr val="E0463A"/>
+          </a:solidFill>
+          <a:ln>
+            <a:noFill/>
+          </a:ln>
+          <a:effectLst/>
+        </p:spPr>
+        <p:style>
+          <a:lnRef idx="1">
+            <a:schemeClr val="accent1"/>
+          </a:lnRef>
+          <a:fillRef idx="3">
+            <a:schemeClr val="accent1"/>
+          </a:fillRef>
+          <a:effectRef idx="2">
+            <a:schemeClr val="accent1"/>
+          </a:effectRef>
+          <a:fontRef idx="minor">
+            <a:schemeClr val="lt1"/>
+          </a:fontRef>
+        </p:style>
+        <p:txBody>
+          <a:bodyPr rtlCol="0" anchor="ctr" lIns="0" rIns="0" tIns="0" bIns="0"/>
+          <a:lstStyle/>
+          <a:p>
+            <a:pPr algn="ctr"/>
+            <a:r>
+              <a:rPr sz="2000" b="1">
+                <a:solidFill>
+                  <a:srgbClr val="FFFFFF"/>
+                </a:solidFill>
+                <a:latin typeface="Calibri"/>
+              </a:rPr>
+              <a:t>3</a:t>
+            </a:r>
+          </a:p>
+        </p:txBody>
+      </p:sp>
+      <p:sp>
+        <p:nvSpPr>
+          <p:cNvPr id="16" name="TextBox 15"/>
+          <p:cNvSpPr txBox="1"/>
+          <p:nvPr/>
+        </p:nvSpPr>
+        <p:spPr>
+          <a:xfrm>
+            <a:off x="5041270" y="3268979"/>
+            <a:ext cx="2109155" cy="731520"/>
+          </a:xfrm>
+          <a:prstGeom prst="rect">
+            <a:avLst/>
+          </a:prstGeom>
+          <a:noFill/>
+        </p:spPr>
+        <p:txBody>
+          <a:bodyPr wrap="square" anchor="t" lIns="0" rIns="0" tIns="0" bIns="0"/>
+          <a:lstStyle/>
+          <a:p>
+            <a:pPr algn="ctr"/>
+            <a:r>
+              <a:rPr sz="1700" b="1" i="0">
+                <a:solidFill>
+                  <a:srgbClr val="03306E"/>
+                </a:solidFill>
+                <a:latin typeface="Calibri"/>
+              </a:rPr>
+              <a:t>Connect functions</a:t>
+            </a:r>
+          </a:p>
+        </p:txBody>
+      </p:sp>
+      <p:sp>
+        <p:nvSpPr>
+          <p:cNvPr id="17" name="Rounded Rectangle 16"/>
+          <p:cNvSpPr/>
+          <p:nvPr/>
+        </p:nvSpPr>
+        <p:spPr>
+          <a:xfrm>
+            <a:off x="5041270" y="4046220"/>
+            <a:ext cx="2109155" cy="1234439"/>
+          </a:xfrm>
+          <a:prstGeom prst="roundRect">
+            <a:avLst>
+              <a:gd name="adj" fmla="val 6000"/>
+            </a:avLst>
+          </a:prstGeom>
+          <a:solidFill>
+            <a:srgbClr val="EAF3FF"/>
+          </a:solidFill>
+          <a:ln>
+            <a:noFill/>
+          </a:ln>
+          <a:effectLst/>
+        </p:spPr>
+        <p:style>
+          <a:lnRef idx="1">
+            <a:schemeClr val="accent1"/>
+          </a:lnRef>
+          <a:fillRef idx="3">
+            <a:schemeClr val="accent1"/>
+          </a:fillRef>
+          <a:effectRef idx="2">
+            <a:schemeClr val="accent1"/>
+          </a:effectRef>
+          <a:fontRef idx="minor">
+            <a:schemeClr val="lt1"/>
+          </a:fontRef>
+        </p:style>
+        <p:txBody>
+          <a:bodyPr rtlCol="0" anchor="ctr"/>
+          <a:lstStyle/>
+          <a:p/>
+        </p:txBody>
+      </p:sp>
+      <p:sp>
+        <p:nvSpPr>
           <p:cNvPr id="18" name="TextBox 17"/>
           <p:cNvSpPr txBox="1"/>
           <p:nvPr/>
         </p:nvSpPr>
         <p:spPr>
           <a:xfrm>
-            <a:off x="8046720" y="1737360"/>
-            <a:ext cx="3291840" cy="365760"/>
+            <a:off x="5178430" y="4183380"/>
+            <a:ext cx="1834835" cy="960119"/>
           </a:xfrm>
           <a:prstGeom prst="rect">
             <a:avLst/>
@@ -7730,27 +9016,80 @@
           <a:p>
             <a:pPr algn="l"/>
             <a:r>
-              <a:rPr sz="1300" b="1" i="0">
-                <a:solidFill>
-                  <a:srgbClr val="0645AD"/>
-                </a:solidFill>
-                <a:latin typeface="Calibri"/>
-              </a:rPr>
-              <a:t>SUCCESS CRITERIA</a:t>
-            </a:r>
-          </a:p>
-        </p:txBody>
-      </p:sp>
-      <p:sp>
-        <p:nvSpPr>
-          <p:cNvPr id="19" name="TextBox 18"/>
+              <a:rPr sz="1800" b="0" i="0">
+                <a:solidFill>
+                  <a:srgbClr val="202122"/>
+                </a:solidFill>
+                <a:latin typeface="Calibri"/>
+              </a:rPr>
+              <a:t>Mechanical, electrical and control links.</a:t>
+            </a:r>
+          </a:p>
+        </p:txBody>
+      </p:sp>
+      <p:sp>
+        <p:nvSpPr>
+          <p:cNvPr id="19" name="Oval 18"/>
+          <p:cNvSpPr/>
+          <p:nvPr/>
+        </p:nvSpPr>
+        <p:spPr>
+          <a:xfrm>
+            <a:off x="8022122" y="2491740"/>
+            <a:ext cx="640080" cy="640080"/>
+          </a:xfrm>
+          <a:prstGeom prst="ellipse">
+            <a:avLst/>
+          </a:prstGeom>
+          <a:solidFill>
+            <a:srgbClr val="E0463A"/>
+          </a:solidFill>
+          <a:ln>
+            <a:noFill/>
+          </a:ln>
+          <a:effectLst/>
+        </p:spPr>
+        <p:style>
+          <a:lnRef idx="1">
+            <a:schemeClr val="accent1"/>
+          </a:lnRef>
+          <a:fillRef idx="3">
+            <a:schemeClr val="accent1"/>
+          </a:fillRef>
+          <a:effectRef idx="2">
+            <a:schemeClr val="accent1"/>
+          </a:effectRef>
+          <a:fontRef idx="minor">
+            <a:schemeClr val="lt1"/>
+          </a:fontRef>
+        </p:style>
+        <p:txBody>
+          <a:bodyPr rtlCol="0" anchor="ctr" lIns="0" rIns="0" tIns="0" bIns="0"/>
+          <a:lstStyle/>
+          <a:p>
+            <a:pPr algn="ctr"/>
+            <a:r>
+              <a:rPr sz="2000" b="1">
+                <a:solidFill>
+                  <a:srgbClr val="FFFFFF"/>
+                </a:solidFill>
+                <a:latin typeface="Calibri"/>
+              </a:rPr>
+              <a:t>4</a:t>
+            </a:r>
+          </a:p>
+        </p:txBody>
+      </p:sp>
+      <p:sp>
+        <p:nvSpPr>
+          <p:cNvPr id="20" name="TextBox 19"/>
           <p:cNvSpPr txBox="1"/>
           <p:nvPr/>
         </p:nvSpPr>
         <p:spPr>
           <a:xfrm>
-            <a:off x="8046720" y="2240280"/>
-            <a:ext cx="3337560" cy="3657600"/>
+            <a:off x="7287585" y="3268979"/>
+            <a:ext cx="2109155" cy="731520"/>
           </a:xfrm>
           <a:prstGeom prst="rect">
             <a:avLst/>
@@ -7758,71 +9097,258 @@
           <a:noFill/>
         </p:spPr>
         <p:txBody>
-          <a:bodyPr wrap="square" lIns="0" rIns="0" tIns="0" bIns="0">
-            <a:spAutoFit/>
-          </a:bodyPr>
-          <a:lstStyle/>
-          <a:p>
-            <a:pPr marL="274320" indent="-274320">
-              <a:spcAft>
-                <a:spcPts val="810"/>
-              </a:spcAft>
-              <a:buClr>
-                <a:srgbClr val="0645AD"/>
-              </a:buClr>
-              <a:buFont typeface="Arial"/>
-              <a:buChar char="•"/>
-            </a:pPr>
-            <a:r>
-              <a:rPr sz="1800" b="0">
+          <a:bodyPr wrap="square" anchor="t" lIns="0" rIns="0" tIns="0" bIns="0"/>
+          <a:lstStyle/>
+          <a:p>
+            <a:pPr algn="ctr"/>
+            <a:r>
+              <a:rPr sz="1700" b="1" i="0">
+                <a:solidFill>
+                  <a:srgbClr val="03306E"/>
+                </a:solidFill>
+                <a:latin typeface="Calibri"/>
+              </a:rPr>
+              <a:t>Test</a:t>
+            </a:r>
+          </a:p>
+        </p:txBody>
+      </p:sp>
+      <p:sp>
+        <p:nvSpPr>
+          <p:cNvPr id="21" name="Rounded Rectangle 20"/>
+          <p:cNvSpPr/>
+          <p:nvPr/>
+        </p:nvSpPr>
+        <p:spPr>
+          <a:xfrm>
+            <a:off x="7287585" y="4046220"/>
+            <a:ext cx="2109155" cy="1234439"/>
+          </a:xfrm>
+          <a:prstGeom prst="roundRect">
+            <a:avLst>
+              <a:gd name="adj" fmla="val 6000"/>
+            </a:avLst>
+          </a:prstGeom>
+          <a:solidFill>
+            <a:srgbClr val="EAF3FF"/>
+          </a:solidFill>
+          <a:ln>
+            <a:noFill/>
+          </a:ln>
+          <a:effectLst/>
+        </p:spPr>
+        <p:style>
+          <a:lnRef idx="1">
+            <a:schemeClr val="accent1"/>
+          </a:lnRef>
+          <a:fillRef idx="3">
+            <a:schemeClr val="accent1"/>
+          </a:fillRef>
+          <a:effectRef idx="2">
+            <a:schemeClr val="accent1"/>
+          </a:effectRef>
+          <a:fontRef idx="minor">
+            <a:schemeClr val="lt1"/>
+          </a:fontRef>
+        </p:style>
+        <p:txBody>
+          <a:bodyPr rtlCol="0" anchor="ctr"/>
+          <a:lstStyle/>
+          <a:p/>
+        </p:txBody>
+      </p:sp>
+      <p:sp>
+        <p:nvSpPr>
+          <p:cNvPr id="22" name="TextBox 21"/>
+          <p:cNvSpPr txBox="1"/>
+          <p:nvPr/>
+        </p:nvSpPr>
+        <p:spPr>
+          <a:xfrm>
+            <a:off x="7424745" y="4183380"/>
+            <a:ext cx="1834835" cy="960119"/>
+          </a:xfrm>
+          <a:prstGeom prst="rect">
+            <a:avLst/>
+          </a:prstGeom>
+          <a:noFill/>
+        </p:spPr>
+        <p:txBody>
+          <a:bodyPr wrap="square" anchor="t" lIns="0" rIns="0" tIns="0" bIns="0"/>
+          <a:lstStyle/>
+          <a:p>
+            <a:pPr algn="l"/>
+            <a:r>
+              <a:rPr sz="1800" b="0" i="0">
                 <a:solidFill>
                   <a:srgbClr val="202122"/>
                 </a:solidFill>
                 <a:latin typeface="Calibri"/>
               </a:rPr>
-              <a:t>All interfaces identified</a:t>
-            </a:r>
-          </a:p>
-          <a:p>
-            <a:pPr marL="274320" indent="-274320">
-              <a:spcAft>
-                <a:spcPts val="810"/>
-              </a:spcAft>
-              <a:buClr>
-                <a:srgbClr val="0645AD"/>
-              </a:buClr>
-              <a:buFont typeface="Arial"/>
-              <a:buChar char="•"/>
-            </a:pPr>
-            <a:r>
-              <a:rPr sz="1800" b="0">
+              <a:t>Check each interface, then the whole.</a:t>
+            </a:r>
+          </a:p>
+        </p:txBody>
+      </p:sp>
+      <p:sp>
+        <p:nvSpPr>
+          <p:cNvPr id="23" name="Oval 22"/>
+          <p:cNvSpPr/>
+          <p:nvPr/>
+        </p:nvSpPr>
+        <p:spPr>
+          <a:xfrm>
+            <a:off x="10268437" y="2491740"/>
+            <a:ext cx="640080" cy="640080"/>
+          </a:xfrm>
+          <a:prstGeom prst="ellipse">
+            <a:avLst/>
+          </a:prstGeom>
+          <a:solidFill>
+            <a:srgbClr val="E0463A"/>
+          </a:solidFill>
+          <a:ln>
+            <a:noFill/>
+          </a:ln>
+          <a:effectLst/>
+        </p:spPr>
+        <p:style>
+          <a:lnRef idx="1">
+            <a:schemeClr val="accent1"/>
+          </a:lnRef>
+          <a:fillRef idx="3">
+            <a:schemeClr val="accent1"/>
+          </a:fillRef>
+          <a:effectRef idx="2">
+            <a:schemeClr val="accent1"/>
+          </a:effectRef>
+          <a:fontRef idx="minor">
+            <a:schemeClr val="lt1"/>
+          </a:fontRef>
+        </p:style>
+        <p:txBody>
+          <a:bodyPr rtlCol="0" anchor="ctr" lIns="0" rIns="0" tIns="0" bIns="0"/>
+          <a:lstStyle/>
+          <a:p>
+            <a:pPr algn="ctr"/>
+            <a:r>
+              <a:rPr sz="2000" b="1">
+                <a:solidFill>
+                  <a:srgbClr val="FFFFFF"/>
+                </a:solidFill>
+                <a:latin typeface="Calibri"/>
+              </a:rPr>
+              <a:t>5</a:t>
+            </a:r>
+          </a:p>
+        </p:txBody>
+      </p:sp>
+      <p:sp>
+        <p:nvSpPr>
+          <p:cNvPr id="24" name="TextBox 23"/>
+          <p:cNvSpPr txBox="1"/>
+          <p:nvPr/>
+        </p:nvSpPr>
+        <p:spPr>
+          <a:xfrm>
+            <a:off x="9533900" y="3268979"/>
+            <a:ext cx="2109155" cy="731520"/>
+          </a:xfrm>
+          <a:prstGeom prst="rect">
+            <a:avLst/>
+          </a:prstGeom>
+          <a:noFill/>
+        </p:spPr>
+        <p:txBody>
+          <a:bodyPr wrap="square" anchor="t" lIns="0" rIns="0" tIns="0" bIns="0"/>
+          <a:lstStyle/>
+          <a:p>
+            <a:pPr algn="ctr"/>
+            <a:r>
+              <a:rPr sz="1700" b="1" i="0">
+                <a:solidFill>
+                  <a:srgbClr val="03306E"/>
+                </a:solidFill>
+                <a:latin typeface="Calibri"/>
+              </a:rPr>
+              <a:t>Commission</a:t>
+            </a:r>
+          </a:p>
+        </p:txBody>
+      </p:sp>
+      <p:sp>
+        <p:nvSpPr>
+          <p:cNvPr id="25" name="Rounded Rectangle 24"/>
+          <p:cNvSpPr/>
+          <p:nvPr/>
+        </p:nvSpPr>
+        <p:spPr>
+          <a:xfrm>
+            <a:off x="9533900" y="4046220"/>
+            <a:ext cx="2109155" cy="1234439"/>
+          </a:xfrm>
+          <a:prstGeom prst="roundRect">
+            <a:avLst>
+              <a:gd name="adj" fmla="val 6000"/>
+            </a:avLst>
+          </a:prstGeom>
+          <a:solidFill>
+            <a:srgbClr val="EAF3FF"/>
+          </a:solidFill>
+          <a:ln>
+            <a:noFill/>
+          </a:ln>
+          <a:effectLst/>
+        </p:spPr>
+        <p:style>
+          <a:lnRef idx="1">
+            <a:schemeClr val="accent1"/>
+          </a:lnRef>
+          <a:fillRef idx="3">
+            <a:schemeClr val="accent1"/>
+          </a:fillRef>
+          <a:effectRef idx="2">
+            <a:schemeClr val="accent1"/>
+          </a:effectRef>
+          <a:fontRef idx="minor">
+            <a:schemeClr val="lt1"/>
+          </a:fontRef>
+        </p:style>
+        <p:txBody>
+          <a:bodyPr rtlCol="0" anchor="ctr"/>
+          <a:lstStyle/>
+          <a:p/>
+        </p:txBody>
+      </p:sp>
+      <p:sp>
+        <p:nvSpPr>
+          <p:cNvPr id="26" name="TextBox 25"/>
+          <p:cNvSpPr txBox="1"/>
+          <p:nvPr/>
+        </p:nvSpPr>
+        <p:spPr>
+          <a:xfrm>
+            <a:off x="9671060" y="4183380"/>
+            <a:ext cx="1834835" cy="960119"/>
+          </a:xfrm>
+          <a:prstGeom prst="rect">
+            <a:avLst/>
+          </a:prstGeom>
+          <a:noFill/>
+        </p:spPr>
+        <p:txBody>
+          <a:bodyPr wrap="square" anchor="t" lIns="0" rIns="0" tIns="0" bIns="0"/>
+          <a:lstStyle/>
+          <a:p>
+            <a:pPr algn="l"/>
+            <a:r>
+              <a:rPr sz="1800" b="0" i="0">
                 <a:solidFill>
                   <a:srgbClr val="202122"/>
                 </a:solidFill>
                 <a:latin typeface="Calibri"/>
               </a:rPr>
-              <a:t>Logical sequence</a:t>
-            </a:r>
-          </a:p>
-          <a:p>
-            <a:pPr marL="274320" indent="-274320">
-              <a:spcAft>
-                <a:spcPts val="810"/>
-              </a:spcAft>
-              <a:buClr>
-                <a:srgbClr val="0645AD"/>
-              </a:buClr>
-              <a:buFont typeface="Arial"/>
-              <a:buChar char="•"/>
-            </a:pPr>
-            <a:r>
-              <a:rPr sz="1800" b="0">
-                <a:solidFill>
-                  <a:srgbClr val="202122"/>
-                </a:solidFill>
-                <a:latin typeface="Calibri"/>
-              </a:rPr>
-              <a:t>Tests are specific</a:t>
+              <a:t>Prove it works as specified.</a:t>
             </a:r>
           </a:p>
         </p:txBody>
@@ -7841,7 +9367,7 @@
     <p:bg>
       <p:bgPr>
         <a:solidFill>
-          <a:srgbClr val="03306E"/>
+          <a:srgbClr val="FFFFFF"/>
         </a:solidFill>
         <a:effectLst/>
       </p:bgPr>
@@ -7877,7 +9403,7 @@
             <a:r>
               <a:rPr sz="1100" b="1" i="0">
                 <a:solidFill>
-                  <a:srgbClr val="A9C8F0"/>
+                  <a:srgbClr val="54595D"/>
                 </a:solidFill>
                 <a:latin typeface="Calibri"/>
               </a:rPr>
@@ -7910,24 +9436,90 @@
             <a:r>
               <a:rPr sz="3200" b="1" i="0">
                 <a:solidFill>
-                  <a:srgbClr val="FFFFFF"/>
+                  <a:srgbClr val="03306E"/>
                 </a:solidFill>
                 <a:latin typeface="Cambria"/>
               </a:rPr>
-              <a:t>Exit ticket</a:t>
-            </a:r>
-          </a:p>
-        </p:txBody>
-      </p:sp>
-      <p:sp>
-        <p:nvSpPr>
-          <p:cNvPr id="4" name="Oval 3"/>
+              <a:t>Quick check: Integrating systems</a:t>
+            </a:r>
+          </a:p>
+        </p:txBody>
+      </p:sp>
+      <p:sp>
+        <p:nvSpPr>
+          <p:cNvPr id="4" name="TextBox 3"/>
+          <p:cNvSpPr txBox="1"/>
+          <p:nvPr/>
+        </p:nvSpPr>
+        <p:spPr>
+          <a:xfrm>
+            <a:off x="548640" y="6446520"/>
+            <a:ext cx="8229600" cy="274320"/>
+          </a:xfrm>
+          <a:prstGeom prst="rect">
+            <a:avLst/>
+          </a:prstGeom>
+          <a:noFill/>
+        </p:spPr>
+        <p:txBody>
+          <a:bodyPr wrap="square" anchor="t" lIns="0" rIns="0" tIns="0" bIns="0"/>
+          <a:lstStyle/>
+          <a:p>
+            <a:pPr algn="l"/>
+            <a:r>
+              <a:rPr sz="1000" b="0" i="0">
+                <a:solidFill>
+                  <a:srgbClr val="54595D"/>
+                </a:solidFill>
+                <a:latin typeface="Calibri"/>
+              </a:rPr>
+              <a:t>Design and Development for Engineering and Manufacturing T Level  ·  Installation and Integration of Systems</a:t>
+            </a:r>
+          </a:p>
+        </p:txBody>
+      </p:sp>
+      <p:sp>
+        <p:nvSpPr>
+          <p:cNvPr id="5" name="TextBox 4"/>
+          <p:cNvSpPr txBox="1"/>
+          <p:nvPr/>
+        </p:nvSpPr>
+        <p:spPr>
+          <a:xfrm>
+            <a:off x="10728655" y="6446520"/>
+            <a:ext cx="914400" cy="274320"/>
+          </a:xfrm>
+          <a:prstGeom prst="rect">
+            <a:avLst/>
+          </a:prstGeom>
+          <a:noFill/>
+        </p:spPr>
+        <p:txBody>
+          <a:bodyPr wrap="square" anchor="t" lIns="0" rIns="0" tIns="0" bIns="0"/>
+          <a:lstStyle/>
+          <a:p>
+            <a:pPr algn="r"/>
+            <a:r>
+              <a:rPr sz="1000" b="0" i="0">
+                <a:solidFill>
+                  <a:srgbClr val="54595D"/>
+                </a:solidFill>
+                <a:latin typeface="Calibri"/>
+              </a:rPr>
+              <a:t>8</a:t>
+            </a:r>
+          </a:p>
+        </p:txBody>
+      </p:sp>
+      <p:sp>
+        <p:nvSpPr>
+          <p:cNvPr id="6" name="Oval 5"/>
           <p:cNvSpPr/>
           <p:nvPr/>
         </p:nvSpPr>
         <p:spPr>
           <a:xfrm>
-            <a:off x="548640" y="1737360"/>
+            <a:off x="548640" y="1691640"/>
             <a:ext cx="502920" cy="502920"/>
           </a:xfrm>
           <a:prstGeom prst="ellipse">
@@ -7961,7 +9553,7 @@
           <a:p>
             <a:pPr algn="ctr"/>
             <a:r>
-              <a:rPr sz="1700" b="1">
+              <a:rPr sz="1600" b="1">
                 <a:solidFill>
                   <a:srgbClr val="FFFFFF"/>
                 </a:solidFill>
@@ -7974,14 +9566,14 @@
       </p:sp>
       <p:sp>
         <p:nvSpPr>
-          <p:cNvPr id="5" name="TextBox 4"/>
+          <p:cNvPr id="7" name="TextBox 6"/>
           <p:cNvSpPr txBox="1"/>
           <p:nvPr/>
         </p:nvSpPr>
         <p:spPr>
           <a:xfrm>
-            <a:off x="1325880" y="1645920"/>
-            <a:ext cx="6583680" cy="822960"/>
+            <a:off x="1371600" y="1645920"/>
+            <a:ext cx="10271455" cy="1188720"/>
           </a:xfrm>
           <a:prstGeom prst="rect">
             <a:avLst/>
@@ -7989,31 +9581,31 @@
           <a:noFill/>
         </p:spPr>
         <p:txBody>
-          <a:bodyPr wrap="square" anchor="ctr" lIns="0" rIns="0" tIns="0" bIns="0"/>
+          <a:bodyPr wrap="square" anchor="t" lIns="0" rIns="0" tIns="0" bIns="0"/>
           <a:lstStyle/>
           <a:p>
             <a:pPr algn="l"/>
             <a:r>
-              <a:rPr sz="2000" b="0" i="0">
-                <a:solidFill>
-                  <a:srgbClr val="FFFFFF"/>
-                </a:solidFill>
-                <a:latin typeface="Calibri"/>
-              </a:rPr>
-              <a:t>Why follow the manufacturer's torque settings?</a:t>
-            </a:r>
-          </a:p>
-        </p:txBody>
-      </p:sp>
-      <p:sp>
-        <p:nvSpPr>
-          <p:cNvPr id="6" name="Oval 5"/>
+              <a:rPr sz="2400" b="0" i="0">
+                <a:solidFill>
+                  <a:srgbClr val="202122"/>
+                </a:solidFill>
+                <a:latin typeface="Calibri"/>
+              </a:rPr>
+              <a:t>What is an interface?</a:t>
+            </a:r>
+          </a:p>
+        </p:txBody>
+      </p:sp>
+      <p:sp>
+        <p:nvSpPr>
+          <p:cNvPr id="8" name="Oval 7"/>
           <p:cNvSpPr/>
           <p:nvPr/>
         </p:nvSpPr>
         <p:spPr>
           <a:xfrm>
-            <a:off x="548640" y="2697480"/>
+            <a:off x="548640" y="3108960"/>
             <a:ext cx="502920" cy="502920"/>
           </a:xfrm>
           <a:prstGeom prst="ellipse">
@@ -8047,7 +9639,7 @@
           <a:p>
             <a:pPr algn="ctr"/>
             <a:r>
-              <a:rPr sz="1700" b="1">
+              <a:rPr sz="1600" b="1">
                 <a:solidFill>
                   <a:srgbClr val="FFFFFF"/>
                 </a:solidFill>
@@ -8060,14 +9652,14 @@
       </p:sp>
       <p:sp>
         <p:nvSpPr>
-          <p:cNvPr id="7" name="TextBox 6"/>
+          <p:cNvPr id="9" name="TextBox 8"/>
           <p:cNvSpPr txBox="1"/>
           <p:nvPr/>
         </p:nvSpPr>
         <p:spPr>
           <a:xfrm>
-            <a:off x="1325880" y="2606040"/>
-            <a:ext cx="6583680" cy="822960"/>
+            <a:off x="1371600" y="3063240"/>
+            <a:ext cx="10271455" cy="1188720"/>
           </a:xfrm>
           <a:prstGeom prst="rect">
             <a:avLst/>
@@ -8075,31 +9667,31 @@
           <a:noFill/>
         </p:spPr>
         <p:txBody>
-          <a:bodyPr wrap="square" anchor="ctr" lIns="0" rIns="0" tIns="0" bIns="0"/>
+          <a:bodyPr wrap="square" anchor="t" lIns="0" rIns="0" tIns="0" bIns="0"/>
           <a:lstStyle/>
           <a:p>
             <a:pPr algn="l"/>
             <a:r>
-              <a:rPr sz="2000" b="0" i="0">
-                <a:solidFill>
-                  <a:srgbClr val="FFFFFF"/>
-                </a:solidFill>
-                <a:latin typeface="Calibri"/>
-              </a:rPr>
-              <a:t>What happens during commissioning?</a:t>
-            </a:r>
-          </a:p>
-        </p:txBody>
-      </p:sp>
-      <p:sp>
-        <p:nvSpPr>
-          <p:cNvPr id="8" name="Oval 7"/>
+              <a:rPr sz="2400" b="0" i="0">
+                <a:solidFill>
+                  <a:srgbClr val="202122"/>
+                </a:solidFill>
+                <a:latin typeface="Calibri"/>
+              </a:rPr>
+              <a:t>Why test interfaces one at a time?</a:t>
+            </a:r>
+          </a:p>
+        </p:txBody>
+      </p:sp>
+      <p:sp>
+        <p:nvSpPr>
+          <p:cNvPr id="10" name="Oval 9"/>
           <p:cNvSpPr/>
           <p:nvPr/>
         </p:nvSpPr>
         <p:spPr>
           <a:xfrm>
-            <a:off x="548640" y="3657600"/>
+            <a:off x="548640" y="4526280"/>
             <a:ext cx="502920" cy="502920"/>
           </a:xfrm>
           <a:prstGeom prst="ellipse">
@@ -8133,7 +9725,7 @@
           <a:p>
             <a:pPr algn="ctr"/>
             <a:r>
-              <a:rPr sz="1700" b="1">
+              <a:rPr sz="1600" b="1">
                 <a:solidFill>
                   <a:srgbClr val="FFFFFF"/>
                 </a:solidFill>
@@ -8146,14 +9738,14 @@
       </p:sp>
       <p:sp>
         <p:nvSpPr>
-          <p:cNvPr id="9" name="TextBox 8"/>
+          <p:cNvPr id="11" name="TextBox 10"/>
           <p:cNvSpPr txBox="1"/>
           <p:nvPr/>
         </p:nvSpPr>
         <p:spPr>
           <a:xfrm>
-            <a:off x="1325880" y="3566160"/>
-            <a:ext cx="6583680" cy="822960"/>
+            <a:off x="1371600" y="4480560"/>
+            <a:ext cx="10271455" cy="1188720"/>
           </a:xfrm>
           <a:prstGeom prst="rect">
             <a:avLst/>
@@ -8161,40 +9753,229 @@
           <a:noFill/>
         </p:spPr>
         <p:txBody>
+          <a:bodyPr wrap="square" anchor="t" lIns="0" rIns="0" tIns="0" bIns="0"/>
+          <a:lstStyle/>
+          <a:p>
+            <a:pPr algn="l"/>
+            <a:r>
+              <a:rPr sz="2400" b="0" i="0">
+                <a:solidFill>
+                  <a:srgbClr val="202122"/>
+                </a:solidFill>
+                <a:latin typeface="Calibri"/>
+              </a:rPr>
+              <a:t>What is the final stage of integration?</a:t>
+            </a:r>
+          </a:p>
+        </p:txBody>
+      </p:sp>
+      <p:sp>
+        <p:nvSpPr>
+          <p:cNvPr id="12" name="TextBox 11"/>
+          <p:cNvSpPr txBox="1"/>
+          <p:nvPr/>
+        </p:nvSpPr>
+        <p:spPr>
+          <a:xfrm>
+            <a:off x="548640" y="5852160"/>
+            <a:ext cx="11094415" cy="365760"/>
+          </a:xfrm>
+          <a:prstGeom prst="rect">
+            <a:avLst/>
+          </a:prstGeom>
+          <a:noFill/>
+        </p:spPr>
+        <p:txBody>
+          <a:bodyPr wrap="square" anchor="t" lIns="0" rIns="0" tIns="0" bIns="0"/>
+          <a:lstStyle/>
+          <a:p>
+            <a:pPr algn="l"/>
+            <a:r>
+              <a:rPr sz="1300" b="0" i="1">
+                <a:solidFill>
+                  <a:srgbClr val="54595D"/>
+                </a:solidFill>
+                <a:latin typeface="Calibri"/>
+              </a:rPr>
+              <a:t>Answer on mini whiteboards or in your book. Answers are in the speaker notes.</a:t>
+            </a:r>
+          </a:p>
+        </p:txBody>
+      </p:sp>
+    </p:spTree>
+  </p:cSld>
+  <p:clrMapOvr>
+    <a:masterClrMapping/>
+  </p:clrMapOvr>
+</p:sld>
+</file>
+
+<file path=ppt/slides/slide9.xml><?xml version="1.0" encoding="utf-8"?>
+<p:sld xmlns:a="http://schemas.openxmlformats.org/drawingml/2006/main" xmlns:p="http://schemas.openxmlformats.org/presentationml/2006/main" xmlns:r="http://schemas.openxmlformats.org/officeDocument/2006/relationships">
+  <p:cSld>
+    <p:bg>
+      <p:bgPr>
+        <a:solidFill>
+          <a:srgbClr val="FFFFFF"/>
+        </a:solidFill>
+        <a:effectLst/>
+      </p:bgPr>
+    </p:bg>
+    <p:spTree>
+      <p:nvGrpSpPr>
+        <p:cNvPr id="1" name=""/>
+        <p:cNvGrpSpPr/>
+        <p:nvPr/>
+      </p:nvGrpSpPr>
+      <p:grpSpPr/>
+      <p:sp>
+        <p:nvSpPr>
+          <p:cNvPr id="2" name="TextBox 1"/>
+          <p:cNvSpPr txBox="1"/>
+          <p:nvPr/>
+        </p:nvSpPr>
+        <p:spPr>
+          <a:xfrm>
+            <a:off x="548640" y="320040"/>
+            <a:ext cx="11094415" cy="274320"/>
+          </a:xfrm>
+          <a:prstGeom prst="rect">
+            <a:avLst/>
+          </a:prstGeom>
+          <a:noFill/>
+        </p:spPr>
+        <p:txBody>
+          <a:bodyPr wrap="square" anchor="t" lIns="0" rIns="0" tIns="0" bIns="0"/>
+          <a:lstStyle/>
+          <a:p>
+            <a:pPr algn="l"/>
+            <a:r>
+              <a:rPr sz="1100" b="1" i="0">
+                <a:solidFill>
+                  <a:srgbClr val="54595D"/>
+                </a:solidFill>
+                <a:latin typeface="Calibri"/>
+              </a:rPr>
+              <a:t>MECHANICAL ENGINEERING  ·  Mechanical: Knowledge criteria</a:t>
+            </a:r>
+          </a:p>
+        </p:txBody>
+      </p:sp>
+      <p:sp>
+        <p:nvSpPr>
+          <p:cNvPr id="3" name="TextBox 2"/>
+          <p:cNvSpPr txBox="1"/>
+          <p:nvPr/>
+        </p:nvSpPr>
+        <p:spPr>
+          <a:xfrm>
+            <a:off x="548640" y="566928"/>
+            <a:ext cx="11094415" cy="822960"/>
+          </a:xfrm>
+          <a:prstGeom prst="rect">
+            <a:avLst/>
+          </a:prstGeom>
+          <a:noFill/>
+        </p:spPr>
+        <p:txBody>
           <a:bodyPr wrap="square" anchor="ctr" lIns="0" rIns="0" tIns="0" bIns="0"/>
           <a:lstStyle/>
           <a:p>
             <a:pPr algn="l"/>
             <a:r>
-              <a:rPr sz="2000" b="0" i="0">
-                <a:solidFill>
-                  <a:srgbClr val="FFFFFF"/>
-                </a:solidFill>
-                <a:latin typeface="Calibri"/>
-              </a:rPr>
-              <a:t>Who needs to sign off an installation?</a:t>
-            </a:r>
-          </a:p>
-        </p:txBody>
-      </p:sp>
-      <p:sp>
-        <p:nvSpPr>
-          <p:cNvPr id="10" name="Rounded Rectangle 9"/>
+              <a:rPr sz="3200" b="1" i="0">
+                <a:solidFill>
+                  <a:srgbClr val="03306E"/>
+                </a:solidFill>
+                <a:latin typeface="Cambria"/>
+              </a:rPr>
+              <a:t>Check your understanding</a:t>
+            </a:r>
+          </a:p>
+        </p:txBody>
+      </p:sp>
+      <p:sp>
+        <p:nvSpPr>
+          <p:cNvPr id="4" name="TextBox 3"/>
+          <p:cNvSpPr txBox="1"/>
+          <p:nvPr/>
+        </p:nvSpPr>
+        <p:spPr>
+          <a:xfrm>
+            <a:off x="548640" y="6446520"/>
+            <a:ext cx="8229600" cy="274320"/>
+          </a:xfrm>
+          <a:prstGeom prst="rect">
+            <a:avLst/>
+          </a:prstGeom>
+          <a:noFill/>
+        </p:spPr>
+        <p:txBody>
+          <a:bodyPr wrap="square" anchor="t" lIns="0" rIns="0" tIns="0" bIns="0"/>
+          <a:lstStyle/>
+          <a:p>
+            <a:pPr algn="l"/>
+            <a:r>
+              <a:rPr sz="1000" b="0" i="0">
+                <a:solidFill>
+                  <a:srgbClr val="54595D"/>
+                </a:solidFill>
+                <a:latin typeface="Calibri"/>
+              </a:rPr>
+              <a:t>Design and Development for Engineering and Manufacturing T Level  ·  Installation and Integration of Systems</a:t>
+            </a:r>
+          </a:p>
+        </p:txBody>
+      </p:sp>
+      <p:sp>
+        <p:nvSpPr>
+          <p:cNvPr id="5" name="TextBox 4"/>
+          <p:cNvSpPr txBox="1"/>
+          <p:nvPr/>
+        </p:nvSpPr>
+        <p:spPr>
+          <a:xfrm>
+            <a:off x="10728655" y="6446520"/>
+            <a:ext cx="914400" cy="274320"/>
+          </a:xfrm>
+          <a:prstGeom prst="rect">
+            <a:avLst/>
+          </a:prstGeom>
+          <a:noFill/>
+        </p:spPr>
+        <p:txBody>
+          <a:bodyPr wrap="square" anchor="t" lIns="0" rIns="0" tIns="0" bIns="0"/>
+          <a:lstStyle/>
+          <a:p>
+            <a:pPr algn="r"/>
+            <a:r>
+              <a:rPr sz="1000" b="0" i="0">
+                <a:solidFill>
+                  <a:srgbClr val="54595D"/>
+                </a:solidFill>
+                <a:latin typeface="Calibri"/>
+              </a:rPr>
+              <a:t>9</a:t>
+            </a:r>
+          </a:p>
+        </p:txBody>
+      </p:sp>
+      <p:sp>
+        <p:nvSpPr>
+          <p:cNvPr id="6" name="Oval 5"/>
           <p:cNvSpPr/>
           <p:nvPr/>
         </p:nvSpPr>
         <p:spPr>
           <a:xfrm>
-            <a:off x="8229600" y="1645920"/>
-            <a:ext cx="3410712" cy="2926080"/>
-          </a:xfrm>
-          <a:prstGeom prst="roundRect">
-            <a:avLst>
-              <a:gd name="adj" fmla="val 8000"/>
-            </a:avLst>
+            <a:off x="548640" y="1618488"/>
+            <a:ext cx="411480" cy="411480"/>
+          </a:xfrm>
+          <a:prstGeom prst="ellipse">
+            <a:avLst/>
           </a:prstGeom>
           <a:solidFill>
-            <a:srgbClr val="0645AD"/>
+            <a:srgbClr val="E0463A"/>
           </a:solidFill>
           <a:ln>
             <a:noFill/>
@@ -8216,9 +9997,192 @@
           </a:fontRef>
         </p:style>
         <p:txBody>
-          <a:bodyPr rtlCol="0" anchor="ctr"/>
-          <a:lstStyle/>
-          <a:p/>
+          <a:bodyPr rtlCol="0" anchor="ctr" lIns="0" rIns="0" tIns="0" bIns="0"/>
+          <a:lstStyle/>
+          <a:p>
+            <a:pPr algn="ctr"/>
+            <a:r>
+              <a:rPr sz="1400" b="1">
+                <a:solidFill>
+                  <a:srgbClr val="FFFFFF"/>
+                </a:solidFill>
+                <a:latin typeface="Calibri"/>
+              </a:rPr>
+              <a:t>1</a:t>
+            </a:r>
+          </a:p>
+        </p:txBody>
+      </p:sp>
+      <p:sp>
+        <p:nvSpPr>
+          <p:cNvPr id="7" name="TextBox 6"/>
+          <p:cNvSpPr txBox="1"/>
+          <p:nvPr/>
+        </p:nvSpPr>
+        <p:spPr>
+          <a:xfrm>
+            <a:off x="1234440" y="1600200"/>
+            <a:ext cx="10408615" cy="1429512"/>
+          </a:xfrm>
+          <a:prstGeom prst="rect">
+            <a:avLst/>
+          </a:prstGeom>
+          <a:noFill/>
+        </p:spPr>
+        <p:txBody>
+          <a:bodyPr wrap="square" anchor="t" lIns="0" rIns="0" tIns="0" bIns="0"/>
+          <a:lstStyle/>
+          <a:p>
+            <a:pPr algn="l"/>
+            <a:r>
+              <a:rPr sz="2200" b="0" i="0">
+                <a:solidFill>
+                  <a:srgbClr val="202122"/>
+                </a:solidFill>
+                <a:latin typeface="Calibri"/>
+              </a:rPr>
+              <a:t>Name three sources of installation requirements.</a:t>
+            </a:r>
+          </a:p>
+        </p:txBody>
+      </p:sp>
+      <p:sp>
+        <p:nvSpPr>
+          <p:cNvPr id="8" name="Oval 7"/>
+          <p:cNvSpPr/>
+          <p:nvPr/>
+        </p:nvSpPr>
+        <p:spPr>
+          <a:xfrm>
+            <a:off x="548640" y="3212592"/>
+            <a:ext cx="411480" cy="411480"/>
+          </a:xfrm>
+          <a:prstGeom prst="ellipse">
+            <a:avLst/>
+          </a:prstGeom>
+          <a:solidFill>
+            <a:srgbClr val="E0463A"/>
+          </a:solidFill>
+          <a:ln>
+            <a:noFill/>
+          </a:ln>
+          <a:effectLst/>
+        </p:spPr>
+        <p:style>
+          <a:lnRef idx="1">
+            <a:schemeClr val="accent1"/>
+          </a:lnRef>
+          <a:fillRef idx="3">
+            <a:schemeClr val="accent1"/>
+          </a:fillRef>
+          <a:effectRef idx="2">
+            <a:schemeClr val="accent1"/>
+          </a:effectRef>
+          <a:fontRef idx="minor">
+            <a:schemeClr val="lt1"/>
+          </a:fontRef>
+        </p:style>
+        <p:txBody>
+          <a:bodyPr rtlCol="0" anchor="ctr" lIns="0" rIns="0" tIns="0" bIns="0"/>
+          <a:lstStyle/>
+          <a:p>
+            <a:pPr algn="ctr"/>
+            <a:r>
+              <a:rPr sz="1400" b="1">
+                <a:solidFill>
+                  <a:srgbClr val="FFFFFF"/>
+                </a:solidFill>
+                <a:latin typeface="Calibri"/>
+              </a:rPr>
+              <a:t>2</a:t>
+            </a:r>
+          </a:p>
+        </p:txBody>
+      </p:sp>
+      <p:sp>
+        <p:nvSpPr>
+          <p:cNvPr id="9" name="TextBox 8"/>
+          <p:cNvSpPr txBox="1"/>
+          <p:nvPr/>
+        </p:nvSpPr>
+        <p:spPr>
+          <a:xfrm>
+            <a:off x="1234440" y="3194304"/>
+            <a:ext cx="10408615" cy="1429512"/>
+          </a:xfrm>
+          <a:prstGeom prst="rect">
+            <a:avLst/>
+          </a:prstGeom>
+          <a:noFill/>
+        </p:spPr>
+        <p:txBody>
+          <a:bodyPr wrap="square" anchor="t" lIns="0" rIns="0" tIns="0" bIns="0"/>
+          <a:lstStyle/>
+          <a:p>
+            <a:pPr algn="l"/>
+            <a:r>
+              <a:rPr sz="2200" b="0" i="0">
+                <a:solidFill>
+                  <a:srgbClr val="202122"/>
+                </a:solidFill>
+                <a:latin typeface="Calibri"/>
+              </a:rPr>
+              <a:t>What is an interface in system integration?</a:t>
+            </a:r>
+          </a:p>
+        </p:txBody>
+      </p:sp>
+      <p:sp>
+        <p:nvSpPr>
+          <p:cNvPr id="10" name="Oval 9"/>
+          <p:cNvSpPr/>
+          <p:nvPr/>
+        </p:nvSpPr>
+        <p:spPr>
+          <a:xfrm>
+            <a:off x="548640" y="4806695"/>
+            <a:ext cx="411480" cy="411480"/>
+          </a:xfrm>
+          <a:prstGeom prst="ellipse">
+            <a:avLst/>
+          </a:prstGeom>
+          <a:solidFill>
+            <a:srgbClr val="E0463A"/>
+          </a:solidFill>
+          <a:ln>
+            <a:noFill/>
+          </a:ln>
+          <a:effectLst/>
+        </p:spPr>
+        <p:style>
+          <a:lnRef idx="1">
+            <a:schemeClr val="accent1"/>
+          </a:lnRef>
+          <a:fillRef idx="3">
+            <a:schemeClr val="accent1"/>
+          </a:fillRef>
+          <a:effectRef idx="2">
+            <a:schemeClr val="accent1"/>
+          </a:effectRef>
+          <a:fontRef idx="minor">
+            <a:schemeClr val="lt1"/>
+          </a:fontRef>
+        </p:style>
+        <p:txBody>
+          <a:bodyPr rtlCol="0" anchor="ctr" lIns="0" rIns="0" tIns="0" bIns="0"/>
+          <a:lstStyle/>
+          <a:p>
+            <a:pPr algn="ctr"/>
+            <a:r>
+              <a:rPr sz="1400" b="1">
+                <a:solidFill>
+                  <a:srgbClr val="FFFFFF"/>
+                </a:solidFill>
+                <a:latin typeface="Calibri"/>
+              </a:rPr>
+              <a:t>3</a:t>
+            </a:r>
+          </a:p>
         </p:txBody>
       </p:sp>
       <p:sp>
@@ -8229,8 +10193,8 @@
         </p:nvSpPr>
         <p:spPr>
           <a:xfrm>
-            <a:off x="8503920" y="1874519"/>
-            <a:ext cx="2926080" cy="365760"/>
+            <a:off x="1234440" y="4788408"/>
+            <a:ext cx="10408615" cy="1429512"/>
           </a:xfrm>
           <a:prstGeom prst="rect">
             <a:avLst/>
@@ -8243,112 +10207,13 @@
           <a:p>
             <a:pPr algn="l"/>
             <a:r>
-              <a:rPr sz="1300" b="1" i="0">
-                <a:solidFill>
-                  <a:srgbClr val="A9C8F0"/>
-                </a:solidFill>
-                <a:latin typeface="Calibri"/>
-              </a:rPr>
-              <a:t>REVISE THIS TOPIC</a:t>
-            </a:r>
-          </a:p>
-        </p:txBody>
-      </p:sp>
-      <p:sp>
-        <p:nvSpPr>
-          <p:cNvPr id="12" name="TextBox 11"/>
-          <p:cNvSpPr txBox="1"/>
-          <p:nvPr/>
-        </p:nvSpPr>
-        <p:spPr>
-          <a:xfrm>
-            <a:off x="8503920" y="2286000"/>
-            <a:ext cx="2926080" cy="548640"/>
-          </a:xfrm>
-          <a:prstGeom prst="rect">
-            <a:avLst/>
-          </a:prstGeom>
-          <a:noFill/>
-        </p:spPr>
-        <p:txBody>
-          <a:bodyPr wrap="square" anchor="t" lIns="0" rIns="0" tIns="0" bIns="0"/>
-          <a:lstStyle/>
-          <a:p>
-            <a:pPr algn="l"/>
-            <a:r>
-              <a:rPr sz="1400" b="0" i="0">
-                <a:solidFill>
-                  <a:srgbClr val="FFFFFF"/>
-                </a:solidFill>
-                <a:latin typeface="Calibri"/>
-              </a:rPr>
-              <a:t>Revision notes for this lesson are on the study wiki:</a:t>
-            </a:r>
-          </a:p>
-        </p:txBody>
-      </p:sp>
-      <p:sp>
-        <p:nvSpPr>
-          <p:cNvPr id="13" name="TextBox 12"/>
-          <p:cNvSpPr txBox="1"/>
-          <p:nvPr/>
-        </p:nvSpPr>
-        <p:spPr>
-          <a:xfrm>
-            <a:off x="8503920" y="2926080"/>
-            <a:ext cx="2926080" cy="1463040"/>
-          </a:xfrm>
-          <a:prstGeom prst="rect">
-            <a:avLst/>
-          </a:prstGeom>
-          <a:noFill/>
-        </p:spPr>
-        <p:txBody>
-          <a:bodyPr wrap="square" anchor="t" lIns="0" rIns="0" tIns="0" bIns="0"/>
-          <a:lstStyle/>
-          <a:p>
-            <a:pPr algn="l"/>
-            <a:r>
-              <a:rPr sz="2000" b="1" i="0">
-                <a:solidFill>
-                  <a:srgbClr val="FFFFFF"/>
-                </a:solidFill>
-                <a:latin typeface="Cambria"/>
-              </a:rPr>
-              <a:t>Knowledge Criteria</a:t>
-            </a:r>
-          </a:p>
-        </p:txBody>
-      </p:sp>
-      <p:sp>
-        <p:nvSpPr>
-          <p:cNvPr id="14" name="TextBox 13"/>
-          <p:cNvSpPr txBox="1"/>
-          <p:nvPr/>
-        </p:nvSpPr>
-        <p:spPr>
-          <a:xfrm>
-            <a:off x="548640" y="5669280"/>
-            <a:ext cx="11094415" cy="548640"/>
-          </a:xfrm>
-          <a:prstGeom prst="rect">
-            <a:avLst/>
-          </a:prstGeom>
-          <a:noFill/>
-        </p:spPr>
-        <p:txBody>
-          <a:bodyPr wrap="square" anchor="t" lIns="0" rIns="0" tIns="0" bIns="0"/>
-          <a:lstStyle/>
-          <a:p>
-            <a:pPr algn="l"/>
-            <a:r>
-              <a:rPr sz="1200" b="0" i="0">
-                <a:solidFill>
-                  <a:srgbClr val="A9C8F0"/>
-                </a:solidFill>
-                <a:latin typeface="Calibri"/>
-              </a:rPr>
-              <a:t>https://lana6478.github.io/T-level-Design-Development-Engineering-Manufacturing/#/02-occupational-specialism/01-knowledge-criteria.md</a:t>
+              <a:rPr sz="2200" b="0" i="0">
+                <a:solidFill>
+                  <a:srgbClr val="202122"/>
+                </a:solidFill>
+                <a:latin typeface="Calibri"/>
+              </a:rPr>
+              <a:t>Why test interfaces before the whole system?</a:t>
             </a:r>
           </a:p>
         </p:txBody>
